--- a/presentacion/UPVenta-exposicion.pptx
+++ b/presentacion/UPVenta-exposicion.pptx
@@ -5,15 +5,15 @@
     <p:sldMasterId id="2147483648" r:id="rId1"/>
   </p:sldMasterIdLst>
   <p:sldIdLst>
-    <p:sldId id="256" r:id="rId7"/>
-    <p:sldId id="257" r:id="rId8"/>
-    <p:sldId id="258" r:id="rId9"/>
-    <p:sldId id="259" r:id="rId10"/>
-    <p:sldId id="260" r:id="rId11"/>
-    <p:sldId id="261" r:id="rId12"/>
-    <p:sldId id="262" r:id="rId13"/>
+    <p:sldId id="256" r:id="rId2"/>
+    <p:sldId id="257" r:id="rId3"/>
+    <p:sldId id="258" r:id="rId4"/>
+    <p:sldId id="259" r:id="rId5"/>
+    <p:sldId id="260" r:id="rId6"/>
+    <p:sldId id="261" r:id="rId7"/>
+    <p:sldId id="262" r:id="rId8"/>
   </p:sldIdLst>
-  <p:sldSz cx="12191695" cy="6858000" type="screen4x3"/>
+  <p:sldSz cx="12192000" cy="6858000"/>
   <p:notesSz cx="6858000" cy="9144000"/>
   <p:defaultTextStyle>
     <a:defPPr>
@@ -110,6 +110,22 @@
       </a:defRPr>
     </a:lvl9pPr>
   </p:defaultTextStyle>
+  <p:extLst>
+    <p:ext uri="{EFAFB233-063F-42B5-8137-9DF3F51BA10A}">
+      <p15:sldGuideLst xmlns:p15="http://schemas.microsoft.com/office/powerpoint/2012/main">
+        <p15:guide id="1" orient="horz" pos="2160">
+          <p15:clr>
+            <a:srgbClr val="A4A3A4"/>
+          </p15:clr>
+        </p15:guide>
+        <p15:guide id="2" pos="2880">
+          <p15:clr>
+            <a:srgbClr val="A4A3A4"/>
+          </p15:clr>
+        </p15:guide>
+      </p15:sldGuideLst>
+    </p:ext>
+  </p:extLst>
 </p:presentation>
 </file>
 
@@ -151,10 +167,9 @@
           <a:lstStyle/>
           <a:p>
             <a:r>
-              <a:rPr lang="en-US" smtClean="0"/>
+              <a:rPr lang="en-US"/>
               <a:t>Click to edit Master title style</a:t>
             </a:r>
-            <a:endParaRPr lang="en-US"/>
           </a:p>
         </p:txBody>
       </p:sp>
@@ -270,10 +285,9 @@
           </a:lstStyle>
           <a:p>
             <a:r>
-              <a:rPr lang="en-US" smtClean="0"/>
+              <a:rPr lang="en-US"/>
               <a:t>Click to edit Master subtitle style</a:t>
             </a:r>
-            <a:endParaRPr lang="en-US"/>
           </a:p>
         </p:txBody>
       </p:sp>
@@ -294,7 +308,7 @@
           <a:p>
             <a:fld id="{5BCAD085-E8A6-8845-BD4E-CB4CCA059FC4}" type="datetimeFigureOut">
               <a:rPr lang="en-US" smtClean="0"/>
-              <a:t>1/27/13</a:t>
+              <a:t>8/27/26</a:t>
             </a:fld>
             <a:endParaRPr lang="en-US"/>
           </a:p>
@@ -388,10 +402,9 @@
           <a:lstStyle/>
           <a:p>
             <a:r>
-              <a:rPr lang="en-US" smtClean="0"/>
+              <a:rPr lang="en-US"/>
               <a:t>Click to edit Master title style</a:t>
             </a:r>
-            <a:endParaRPr lang="en-US"/>
           </a:p>
         </p:txBody>
       </p:sp>
@@ -412,38 +425,37 @@
           <a:p>
             <a:pPr lvl="0"/>
             <a:r>
-              <a:rPr lang="en-US" smtClean="0"/>
+              <a:rPr lang="en-US"/>
               <a:t>Click to edit Master text styles</a:t>
             </a:r>
           </a:p>
           <a:p>
             <a:pPr lvl="1"/>
             <a:r>
-              <a:rPr lang="en-US" smtClean="0"/>
+              <a:rPr lang="en-US"/>
               <a:t>Second level</a:t>
             </a:r>
           </a:p>
           <a:p>
             <a:pPr lvl="2"/>
             <a:r>
-              <a:rPr lang="en-US" smtClean="0"/>
+              <a:rPr lang="en-US"/>
               <a:t>Third level</a:t>
             </a:r>
           </a:p>
           <a:p>
             <a:pPr lvl="3"/>
             <a:r>
-              <a:rPr lang="en-US" smtClean="0"/>
+              <a:rPr lang="en-US"/>
               <a:t>Fourth level</a:t>
             </a:r>
           </a:p>
           <a:p>
             <a:pPr lvl="4"/>
             <a:r>
-              <a:rPr lang="en-US" smtClean="0"/>
+              <a:rPr lang="en-US"/>
               <a:t>Fifth level</a:t>
             </a:r>
-            <a:endParaRPr lang="en-US"/>
           </a:p>
         </p:txBody>
       </p:sp>
@@ -464,7 +476,7 @@
           <a:p>
             <a:fld id="{5BCAD085-E8A6-8845-BD4E-CB4CCA059FC4}" type="datetimeFigureOut">
               <a:rPr lang="en-US" smtClean="0"/>
-              <a:t>1/27/13</a:t>
+              <a:t>8/27/26</a:t>
             </a:fld>
             <a:endParaRPr lang="en-US"/>
           </a:p>
@@ -563,10 +575,9 @@
           <a:lstStyle/>
           <a:p>
             <a:r>
-              <a:rPr lang="en-US" smtClean="0"/>
+              <a:rPr lang="en-US"/>
               <a:t>Click to edit Master title style</a:t>
             </a:r>
-            <a:endParaRPr lang="en-US"/>
           </a:p>
         </p:txBody>
       </p:sp>
@@ -592,38 +603,37 @@
           <a:p>
             <a:pPr lvl="0"/>
             <a:r>
-              <a:rPr lang="en-US" smtClean="0"/>
+              <a:rPr lang="en-US"/>
               <a:t>Click to edit Master text styles</a:t>
             </a:r>
           </a:p>
           <a:p>
             <a:pPr lvl="1"/>
             <a:r>
-              <a:rPr lang="en-US" smtClean="0"/>
+              <a:rPr lang="en-US"/>
               <a:t>Second level</a:t>
             </a:r>
           </a:p>
           <a:p>
             <a:pPr lvl="2"/>
             <a:r>
-              <a:rPr lang="en-US" smtClean="0"/>
+              <a:rPr lang="en-US"/>
               <a:t>Third level</a:t>
             </a:r>
           </a:p>
           <a:p>
             <a:pPr lvl="3"/>
             <a:r>
-              <a:rPr lang="en-US" smtClean="0"/>
+              <a:rPr lang="en-US"/>
               <a:t>Fourth level</a:t>
             </a:r>
           </a:p>
           <a:p>
             <a:pPr lvl="4"/>
             <a:r>
-              <a:rPr lang="en-US" smtClean="0"/>
+              <a:rPr lang="en-US"/>
               <a:t>Fifth level</a:t>
             </a:r>
-            <a:endParaRPr lang="en-US"/>
           </a:p>
         </p:txBody>
       </p:sp>
@@ -644,7 +654,7 @@
           <a:p>
             <a:fld id="{5BCAD085-E8A6-8845-BD4E-CB4CCA059FC4}" type="datetimeFigureOut">
               <a:rPr lang="en-US" smtClean="0"/>
-              <a:t>1/27/13</a:t>
+              <a:t>8/27/26</a:t>
             </a:fld>
             <a:endParaRPr lang="en-US"/>
           </a:p>
@@ -738,10 +748,9 @@
           <a:lstStyle/>
           <a:p>
             <a:r>
-              <a:rPr lang="en-US" smtClean="0"/>
+              <a:rPr lang="en-US"/>
               <a:t>Click to edit Master title style</a:t>
             </a:r>
-            <a:endParaRPr lang="en-US"/>
           </a:p>
         </p:txBody>
       </p:sp>
@@ -762,38 +771,37 @@
           <a:p>
             <a:pPr lvl="0"/>
             <a:r>
-              <a:rPr lang="en-US" smtClean="0"/>
+              <a:rPr lang="en-US"/>
               <a:t>Click to edit Master text styles</a:t>
             </a:r>
           </a:p>
           <a:p>
             <a:pPr lvl="1"/>
             <a:r>
-              <a:rPr lang="en-US" smtClean="0"/>
+              <a:rPr lang="en-US"/>
               <a:t>Second level</a:t>
             </a:r>
           </a:p>
           <a:p>
             <a:pPr lvl="2"/>
             <a:r>
-              <a:rPr lang="en-US" smtClean="0"/>
+              <a:rPr lang="en-US"/>
               <a:t>Third level</a:t>
             </a:r>
           </a:p>
           <a:p>
             <a:pPr lvl="3"/>
             <a:r>
-              <a:rPr lang="en-US" smtClean="0"/>
+              <a:rPr lang="en-US"/>
               <a:t>Fourth level</a:t>
             </a:r>
           </a:p>
           <a:p>
             <a:pPr lvl="4"/>
             <a:r>
-              <a:rPr lang="en-US" smtClean="0"/>
+              <a:rPr lang="en-US"/>
               <a:t>Fifth level</a:t>
             </a:r>
-            <a:endParaRPr lang="en-US"/>
           </a:p>
         </p:txBody>
       </p:sp>
@@ -814,7 +822,7 @@
           <a:p>
             <a:fld id="{5BCAD085-E8A6-8845-BD4E-CB4CCA059FC4}" type="datetimeFigureOut">
               <a:rPr lang="en-US" smtClean="0"/>
-              <a:t>1/27/13</a:t>
+              <a:t>8/27/26</a:t>
             </a:fld>
             <a:endParaRPr lang="en-US"/>
           </a:p>
@@ -917,10 +925,9 @@
           </a:lstStyle>
           <a:p>
             <a:r>
-              <a:rPr lang="en-US" smtClean="0"/>
+              <a:rPr lang="en-US"/>
               <a:t>Click to edit Master title style</a:t>
             </a:r>
-            <a:endParaRPr lang="en-US"/>
           </a:p>
         </p:txBody>
       </p:sp>
@@ -1037,7 +1044,7 @@
           <a:p>
             <a:pPr lvl="0"/>
             <a:r>
-              <a:rPr lang="en-US" smtClean="0"/>
+              <a:rPr lang="en-US"/>
               <a:t>Click to edit Master text styles</a:t>
             </a:r>
           </a:p>
@@ -1060,7 +1067,7 @@
           <a:p>
             <a:fld id="{5BCAD085-E8A6-8845-BD4E-CB4CCA059FC4}" type="datetimeFigureOut">
               <a:rPr lang="en-US" smtClean="0"/>
-              <a:t>1/27/13</a:t>
+              <a:t>8/27/26</a:t>
             </a:fld>
             <a:endParaRPr lang="en-US"/>
           </a:p>
@@ -1154,10 +1161,9 @@
           <a:lstStyle/>
           <a:p>
             <a:r>
-              <a:rPr lang="en-US" smtClean="0"/>
+              <a:rPr lang="en-US"/>
               <a:t>Click to edit Master title style</a:t>
             </a:r>
-            <a:endParaRPr lang="en-US"/>
           </a:p>
         </p:txBody>
       </p:sp>
@@ -1211,38 +1217,37 @@
           <a:p>
             <a:pPr lvl="0"/>
             <a:r>
-              <a:rPr lang="en-US" smtClean="0"/>
+              <a:rPr lang="en-US"/>
               <a:t>Click to edit Master text styles</a:t>
             </a:r>
           </a:p>
           <a:p>
             <a:pPr lvl="1"/>
             <a:r>
-              <a:rPr lang="en-US" smtClean="0"/>
+              <a:rPr lang="en-US"/>
               <a:t>Second level</a:t>
             </a:r>
           </a:p>
           <a:p>
             <a:pPr lvl="2"/>
             <a:r>
-              <a:rPr lang="en-US" smtClean="0"/>
+              <a:rPr lang="en-US"/>
               <a:t>Third level</a:t>
             </a:r>
           </a:p>
           <a:p>
             <a:pPr lvl="3"/>
             <a:r>
-              <a:rPr lang="en-US" smtClean="0"/>
+              <a:rPr lang="en-US"/>
               <a:t>Fourth level</a:t>
             </a:r>
           </a:p>
           <a:p>
             <a:pPr lvl="4"/>
             <a:r>
-              <a:rPr lang="en-US" smtClean="0"/>
+              <a:rPr lang="en-US"/>
               <a:t>Fifth level</a:t>
             </a:r>
-            <a:endParaRPr lang="en-US"/>
           </a:p>
         </p:txBody>
       </p:sp>
@@ -1296,38 +1301,37 @@
           <a:p>
             <a:pPr lvl="0"/>
             <a:r>
-              <a:rPr lang="en-US" smtClean="0"/>
+              <a:rPr lang="en-US"/>
               <a:t>Click to edit Master text styles</a:t>
             </a:r>
           </a:p>
           <a:p>
             <a:pPr lvl="1"/>
             <a:r>
-              <a:rPr lang="en-US" smtClean="0"/>
+              <a:rPr lang="en-US"/>
               <a:t>Second level</a:t>
             </a:r>
           </a:p>
           <a:p>
             <a:pPr lvl="2"/>
             <a:r>
-              <a:rPr lang="en-US" smtClean="0"/>
+              <a:rPr lang="en-US"/>
               <a:t>Third level</a:t>
             </a:r>
           </a:p>
           <a:p>
             <a:pPr lvl="3"/>
             <a:r>
-              <a:rPr lang="en-US" smtClean="0"/>
+              <a:rPr lang="en-US"/>
               <a:t>Fourth level</a:t>
             </a:r>
           </a:p>
           <a:p>
             <a:pPr lvl="4"/>
             <a:r>
-              <a:rPr lang="en-US" smtClean="0"/>
+              <a:rPr lang="en-US"/>
               <a:t>Fifth level</a:t>
             </a:r>
-            <a:endParaRPr lang="en-US"/>
           </a:p>
         </p:txBody>
       </p:sp>
@@ -1348,7 +1352,7 @@
           <a:p>
             <a:fld id="{5BCAD085-E8A6-8845-BD4E-CB4CCA059FC4}" type="datetimeFigureOut">
               <a:rPr lang="en-US" smtClean="0"/>
-              <a:t>1/27/13</a:t>
+              <a:t>8/27/26</a:t>
             </a:fld>
             <a:endParaRPr lang="en-US"/>
           </a:p>
@@ -1446,10 +1450,9 @@
           </a:lstStyle>
           <a:p>
             <a:r>
-              <a:rPr lang="en-US" smtClean="0"/>
+              <a:rPr lang="en-US"/>
               <a:t>Click to edit Master title style</a:t>
             </a:r>
-            <a:endParaRPr lang="en-US"/>
           </a:p>
         </p:txBody>
       </p:sp>
@@ -1512,7 +1515,7 @@
           <a:p>
             <a:pPr lvl="0"/>
             <a:r>
-              <a:rPr lang="en-US" smtClean="0"/>
+              <a:rPr lang="en-US"/>
               <a:t>Click to edit Master text styles</a:t>
             </a:r>
           </a:p>
@@ -1568,38 +1571,37 @@
           <a:p>
             <a:pPr lvl="0"/>
             <a:r>
-              <a:rPr lang="en-US" smtClean="0"/>
+              <a:rPr lang="en-US"/>
               <a:t>Click to edit Master text styles</a:t>
             </a:r>
           </a:p>
           <a:p>
             <a:pPr lvl="1"/>
             <a:r>
-              <a:rPr lang="en-US" smtClean="0"/>
+              <a:rPr lang="en-US"/>
               <a:t>Second level</a:t>
             </a:r>
           </a:p>
           <a:p>
             <a:pPr lvl="2"/>
             <a:r>
-              <a:rPr lang="en-US" smtClean="0"/>
+              <a:rPr lang="en-US"/>
               <a:t>Third level</a:t>
             </a:r>
           </a:p>
           <a:p>
             <a:pPr lvl="3"/>
             <a:r>
-              <a:rPr lang="en-US" smtClean="0"/>
+              <a:rPr lang="en-US"/>
               <a:t>Fourth level</a:t>
             </a:r>
           </a:p>
           <a:p>
             <a:pPr lvl="4"/>
             <a:r>
-              <a:rPr lang="en-US" smtClean="0"/>
+              <a:rPr lang="en-US"/>
               <a:t>Fifth level</a:t>
             </a:r>
-            <a:endParaRPr lang="en-US"/>
           </a:p>
         </p:txBody>
       </p:sp>
@@ -1662,7 +1664,7 @@
           <a:p>
             <a:pPr lvl="0"/>
             <a:r>
-              <a:rPr lang="en-US" smtClean="0"/>
+              <a:rPr lang="en-US"/>
               <a:t>Click to edit Master text styles</a:t>
             </a:r>
           </a:p>
@@ -1718,38 +1720,37 @@
           <a:p>
             <a:pPr lvl="0"/>
             <a:r>
-              <a:rPr lang="en-US" smtClean="0"/>
+              <a:rPr lang="en-US"/>
               <a:t>Click to edit Master text styles</a:t>
             </a:r>
           </a:p>
           <a:p>
             <a:pPr lvl="1"/>
             <a:r>
-              <a:rPr lang="en-US" smtClean="0"/>
+              <a:rPr lang="en-US"/>
               <a:t>Second level</a:t>
             </a:r>
           </a:p>
           <a:p>
             <a:pPr lvl="2"/>
             <a:r>
-              <a:rPr lang="en-US" smtClean="0"/>
+              <a:rPr lang="en-US"/>
               <a:t>Third level</a:t>
             </a:r>
           </a:p>
           <a:p>
             <a:pPr lvl="3"/>
             <a:r>
-              <a:rPr lang="en-US" smtClean="0"/>
+              <a:rPr lang="en-US"/>
               <a:t>Fourth level</a:t>
             </a:r>
           </a:p>
           <a:p>
             <a:pPr lvl="4"/>
             <a:r>
-              <a:rPr lang="en-US" smtClean="0"/>
+              <a:rPr lang="en-US"/>
               <a:t>Fifth level</a:t>
             </a:r>
-            <a:endParaRPr lang="en-US"/>
           </a:p>
         </p:txBody>
       </p:sp>
@@ -1770,7 +1771,7 @@
           <a:p>
             <a:fld id="{5BCAD085-E8A6-8845-BD4E-CB4CCA059FC4}" type="datetimeFigureOut">
               <a:rPr lang="en-US" smtClean="0"/>
-              <a:t>1/27/13</a:t>
+              <a:t>8/27/26</a:t>
             </a:fld>
             <a:endParaRPr lang="en-US"/>
           </a:p>
@@ -1864,10 +1865,9 @@
           <a:lstStyle/>
           <a:p>
             <a:r>
-              <a:rPr lang="en-US" smtClean="0"/>
+              <a:rPr lang="en-US"/>
               <a:t>Click to edit Master title style</a:t>
             </a:r>
-            <a:endParaRPr lang="en-US"/>
           </a:p>
         </p:txBody>
       </p:sp>
@@ -1888,7 +1888,7 @@
           <a:p>
             <a:fld id="{5BCAD085-E8A6-8845-BD4E-CB4CCA059FC4}" type="datetimeFigureOut">
               <a:rPr lang="en-US" smtClean="0"/>
-              <a:t>1/27/13</a:t>
+              <a:t>8/27/26</a:t>
             </a:fld>
             <a:endParaRPr lang="en-US"/>
           </a:p>
@@ -1983,7 +1983,7 @@
           <a:p>
             <a:fld id="{5BCAD085-E8A6-8845-BD4E-CB4CCA059FC4}" type="datetimeFigureOut">
               <a:rPr lang="en-US" smtClean="0"/>
-              <a:t>1/27/13</a:t>
+              <a:t>8/27/26</a:t>
             </a:fld>
             <a:endParaRPr lang="en-US"/>
           </a:p>
@@ -2086,10 +2086,9 @@
           </a:lstStyle>
           <a:p>
             <a:r>
-              <a:rPr lang="en-US" smtClean="0"/>
+              <a:rPr lang="en-US"/>
               <a:t>Click to edit Master title style</a:t>
             </a:r>
-            <a:endParaRPr lang="en-US"/>
           </a:p>
         </p:txBody>
       </p:sp>
@@ -2143,38 +2142,37 @@
           <a:p>
             <a:pPr lvl="0"/>
             <a:r>
-              <a:rPr lang="en-US" smtClean="0"/>
+              <a:rPr lang="en-US"/>
               <a:t>Click to edit Master text styles</a:t>
             </a:r>
           </a:p>
           <a:p>
             <a:pPr lvl="1"/>
             <a:r>
-              <a:rPr lang="en-US" smtClean="0"/>
+              <a:rPr lang="en-US"/>
               <a:t>Second level</a:t>
             </a:r>
           </a:p>
           <a:p>
             <a:pPr lvl="2"/>
             <a:r>
-              <a:rPr lang="en-US" smtClean="0"/>
+              <a:rPr lang="en-US"/>
               <a:t>Third level</a:t>
             </a:r>
           </a:p>
           <a:p>
             <a:pPr lvl="3"/>
             <a:r>
-              <a:rPr lang="en-US" smtClean="0"/>
+              <a:rPr lang="en-US"/>
               <a:t>Fourth level</a:t>
             </a:r>
           </a:p>
           <a:p>
             <a:pPr lvl="4"/>
             <a:r>
-              <a:rPr lang="en-US" smtClean="0"/>
+              <a:rPr lang="en-US"/>
               <a:t>Fifth level</a:t>
             </a:r>
-            <a:endParaRPr lang="en-US"/>
           </a:p>
         </p:txBody>
       </p:sp>
@@ -2237,7 +2235,7 @@
           <a:p>
             <a:pPr lvl="0"/>
             <a:r>
-              <a:rPr lang="en-US" smtClean="0"/>
+              <a:rPr lang="en-US"/>
               <a:t>Click to edit Master text styles</a:t>
             </a:r>
           </a:p>
@@ -2260,7 +2258,7 @@
           <a:p>
             <a:fld id="{5BCAD085-E8A6-8845-BD4E-CB4CCA059FC4}" type="datetimeFigureOut">
               <a:rPr lang="en-US" smtClean="0"/>
-              <a:t>1/27/13</a:t>
+              <a:t>8/27/26</a:t>
             </a:fld>
             <a:endParaRPr lang="en-US"/>
           </a:p>
@@ -2363,10 +2361,9 @@
           </a:lstStyle>
           <a:p>
             <a:r>
-              <a:rPr lang="en-US" smtClean="0"/>
+              <a:rPr lang="en-US"/>
               <a:t>Click to edit Master title style</a:t>
             </a:r>
-            <a:endParaRPr lang="en-US"/>
           </a:p>
         </p:txBody>
       </p:sp>
@@ -2490,7 +2487,7 @@
           <a:p>
             <a:pPr lvl="0"/>
             <a:r>
-              <a:rPr lang="en-US" smtClean="0"/>
+              <a:rPr lang="en-US"/>
               <a:t>Click to edit Master text styles</a:t>
             </a:r>
           </a:p>
@@ -2513,7 +2510,7 @@
           <a:p>
             <a:fld id="{5BCAD085-E8A6-8845-BD4E-CB4CCA059FC4}" type="datetimeFigureOut">
               <a:rPr lang="en-US" smtClean="0"/>
-              <a:t>1/27/13</a:t>
+              <a:t>8/27/26</a:t>
             </a:fld>
             <a:endParaRPr lang="en-US"/>
           </a:p>
@@ -2622,10 +2619,9 @@
           <a:lstStyle/>
           <a:p>
             <a:r>
-              <a:rPr lang="en-US" smtClean="0"/>
+              <a:rPr lang="en-US"/>
               <a:t>Click to edit Master title style</a:t>
             </a:r>
-            <a:endParaRPr lang="en-US"/>
           </a:p>
         </p:txBody>
       </p:sp>
@@ -2656,38 +2652,37 @@
           <a:p>
             <a:pPr lvl="0"/>
             <a:r>
-              <a:rPr lang="en-US" smtClean="0"/>
+              <a:rPr lang="en-US"/>
               <a:t>Click to edit Master text styles</a:t>
             </a:r>
           </a:p>
           <a:p>
             <a:pPr lvl="1"/>
             <a:r>
-              <a:rPr lang="en-US" smtClean="0"/>
+              <a:rPr lang="en-US"/>
               <a:t>Second level</a:t>
             </a:r>
           </a:p>
           <a:p>
             <a:pPr lvl="2"/>
             <a:r>
-              <a:rPr lang="en-US" smtClean="0"/>
+              <a:rPr lang="en-US"/>
               <a:t>Third level</a:t>
             </a:r>
           </a:p>
           <a:p>
             <a:pPr lvl="3"/>
             <a:r>
-              <a:rPr lang="en-US" smtClean="0"/>
+              <a:rPr lang="en-US"/>
               <a:t>Fourth level</a:t>
             </a:r>
           </a:p>
           <a:p>
             <a:pPr lvl="4"/>
             <a:r>
-              <a:rPr lang="en-US" smtClean="0"/>
+              <a:rPr lang="en-US"/>
               <a:t>Fifth level</a:t>
             </a:r>
-            <a:endParaRPr lang="en-US"/>
           </a:p>
         </p:txBody>
       </p:sp>
@@ -2726,7 +2721,7 @@
           <a:p>
             <a:fld id="{5BCAD085-E8A6-8845-BD4E-CB4CCA059FC4}" type="datetimeFigureOut">
               <a:rPr lang="en-US" smtClean="0"/>
-              <a:t>1/27/13</a:t>
+              <a:t>8/27/26</a:t>
             </a:fld>
             <a:endParaRPr lang="en-US"/>
           </a:p>
@@ -3085,7 +3080,7 @@
 </file>
 
 <file path=ppt/slides/slide1.xml><?xml version="1.0" encoding="utf-8"?>
-<p:sld xmlns:a="http://schemas.openxmlformats.org/drawingml/2006/main" xmlns:p="http://schemas.openxmlformats.org/presentationml/2006/main" xmlns:r="http://schemas.openxmlformats.org/officeDocument/2006/relationships">
+<p:sld xmlns:a="http://schemas.openxmlformats.org/drawingml/2006/main" xmlns:r="http://schemas.openxmlformats.org/officeDocument/2006/relationships" xmlns:p="http://schemas.openxmlformats.org/presentationml/2006/main">
   <p:cSld>
     <p:spTree>
       <p:nvGrpSpPr>
@@ -3093,7 +3088,14 @@
         <p:cNvGrpSpPr/>
         <p:nvPr/>
       </p:nvGrpSpPr>
-      <p:grpSpPr/>
+      <p:grpSpPr>
+        <a:xfrm>
+          <a:off x="0" y="0"/>
+          <a:ext cx="0" cy="0"/>
+          <a:chOff x="0" y="0"/>
+          <a:chExt cx="0" cy="0"/>
+        </a:xfrm>
+      </p:grpSpPr>
       <p:sp>
         <p:nvSpPr>
           <p:cNvPr id="2" name="Rectangle 1"/>
@@ -3134,6 +3136,7 @@
           <a:lstStyle/>
           <a:p>
             <a:pPr algn="ctr"/>
+            <a:endParaRPr/>
           </a:p>
         </p:txBody>
       </p:sp>
@@ -3177,6 +3180,7 @@
           <a:lstStyle/>
           <a:p>
             <a:pPr algn="ctr"/>
+            <a:endParaRPr/>
           </a:p>
         </p:txBody>
       </p:sp>
@@ -3355,7 +3359,7 @@
 </file>
 
 <file path=ppt/slides/slide2.xml><?xml version="1.0" encoding="utf-8"?>
-<p:sld xmlns:a="http://schemas.openxmlformats.org/drawingml/2006/main" xmlns:p="http://schemas.openxmlformats.org/presentationml/2006/main" xmlns:r="http://schemas.openxmlformats.org/officeDocument/2006/relationships">
+<p:sld xmlns:a="http://schemas.openxmlformats.org/drawingml/2006/main" xmlns:r="http://schemas.openxmlformats.org/officeDocument/2006/relationships" xmlns:p="http://schemas.openxmlformats.org/presentationml/2006/main">
   <p:cSld>
     <p:spTree>
       <p:nvGrpSpPr>
@@ -3363,7 +3367,14 @@
         <p:cNvGrpSpPr/>
         <p:nvPr/>
       </p:nvGrpSpPr>
-      <p:grpSpPr/>
+      <p:grpSpPr>
+        <a:xfrm>
+          <a:off x="0" y="0"/>
+          <a:ext cx="0" cy="0"/>
+          <a:chOff x="0" y="0"/>
+          <a:chExt cx="0" cy="0"/>
+        </a:xfrm>
+      </p:grpSpPr>
       <p:sp>
         <p:nvSpPr>
           <p:cNvPr id="2" name="Rectangle 1"/>
@@ -3404,6 +3415,7 @@
           <a:lstStyle/>
           <a:p>
             <a:pPr algn="ctr"/>
+            <a:endParaRPr/>
           </a:p>
         </p:txBody>
       </p:sp>
@@ -3447,6 +3459,7 @@
           <a:lstStyle/>
           <a:p>
             <a:pPr algn="ctr"/>
+            <a:endParaRPr/>
           </a:p>
         </p:txBody>
       </p:sp>
@@ -3621,7 +3634,7 @@
 </file>
 
 <file path=ppt/slides/slide3.xml><?xml version="1.0" encoding="utf-8"?>
-<p:sld xmlns:a="http://schemas.openxmlformats.org/drawingml/2006/main" xmlns:p="http://schemas.openxmlformats.org/presentationml/2006/main" xmlns:r="http://schemas.openxmlformats.org/officeDocument/2006/relationships">
+<p:sld xmlns:a="http://schemas.openxmlformats.org/drawingml/2006/main" xmlns:r="http://schemas.openxmlformats.org/officeDocument/2006/relationships" xmlns:p="http://schemas.openxmlformats.org/presentationml/2006/main">
   <p:cSld>
     <p:spTree>
       <p:nvGrpSpPr>
@@ -3629,7 +3642,14 @@
         <p:cNvGrpSpPr/>
         <p:nvPr/>
       </p:nvGrpSpPr>
-      <p:grpSpPr/>
+      <p:grpSpPr>
+        <a:xfrm>
+          <a:off x="0" y="0"/>
+          <a:ext cx="0" cy="0"/>
+          <a:chOff x="0" y="0"/>
+          <a:chExt cx="0" cy="0"/>
+        </a:xfrm>
+      </p:grpSpPr>
       <p:sp>
         <p:nvSpPr>
           <p:cNvPr id="2" name="Rectangle 1"/>
@@ -3670,6 +3690,7 @@
           <a:lstStyle/>
           <a:p>
             <a:pPr algn="ctr"/>
+            <a:endParaRPr/>
           </a:p>
         </p:txBody>
       </p:sp>
@@ -3713,6 +3734,7 @@
           <a:lstStyle/>
           <a:p>
             <a:pPr algn="ctr"/>
+            <a:endParaRPr/>
           </a:p>
         </p:txBody>
       </p:sp>
@@ -3860,6 +3882,7 @@
           <a:lstStyle/>
           <a:p>
             <a:pPr algn="ctr"/>
+            <a:endParaRPr/>
           </a:p>
         </p:txBody>
       </p:sp>
@@ -3956,6 +3979,7 @@
           <a:lstStyle/>
           <a:p>
             <a:pPr algn="ctr"/>
+            <a:endParaRPr/>
           </a:p>
         </p:txBody>
       </p:sp>
@@ -4052,6 +4076,7 @@
           <a:lstStyle/>
           <a:p>
             <a:pPr algn="ctr"/>
+            <a:endParaRPr/>
           </a:p>
         </p:txBody>
       </p:sp>
@@ -4115,7 +4140,7 @@
 </file>
 
 <file path=ppt/slides/slide4.xml><?xml version="1.0" encoding="utf-8"?>
-<p:sld xmlns:a="http://schemas.openxmlformats.org/drawingml/2006/main" xmlns:p="http://schemas.openxmlformats.org/presentationml/2006/main" xmlns:r="http://schemas.openxmlformats.org/officeDocument/2006/relationships">
+<p:sld xmlns:a="http://schemas.openxmlformats.org/drawingml/2006/main" xmlns:r="http://schemas.openxmlformats.org/officeDocument/2006/relationships" xmlns:p="http://schemas.openxmlformats.org/presentationml/2006/main">
   <p:cSld>
     <p:spTree>
       <p:nvGrpSpPr>
@@ -4123,7 +4148,14 @@
         <p:cNvGrpSpPr/>
         <p:nvPr/>
       </p:nvGrpSpPr>
-      <p:grpSpPr/>
+      <p:grpSpPr>
+        <a:xfrm>
+          <a:off x="0" y="0"/>
+          <a:ext cx="0" cy="0"/>
+          <a:chOff x="0" y="0"/>
+          <a:chExt cx="0" cy="0"/>
+        </a:xfrm>
+      </p:grpSpPr>
       <p:sp>
         <p:nvSpPr>
           <p:cNvPr id="2" name="Rectangle 1"/>
@@ -4164,6 +4196,7 @@
           <a:lstStyle/>
           <a:p>
             <a:pPr algn="ctr"/>
+            <a:endParaRPr/>
           </a:p>
         </p:txBody>
       </p:sp>
@@ -4207,6 +4240,7 @@
           <a:lstStyle/>
           <a:p>
             <a:pPr algn="ctr"/>
+            <a:endParaRPr/>
           </a:p>
         </p:txBody>
       </p:sp>
@@ -4283,7 +4317,7 @@
         </p:nvSpPr>
         <p:spPr>
           <a:xfrm>
-            <a:off x="640080" y="1828800"/>
+            <a:off x="545516" y="1216152"/>
             <a:ext cx="3977639" cy="4160520"/>
           </a:xfrm>
           <a:prstGeom prst="roundRect">
@@ -4317,6 +4351,7 @@
           <a:lstStyle/>
           <a:p>
             <a:pPr algn="ctr"/>
+            <a:endParaRPr/>
           </a:p>
         </p:txBody>
       </p:sp>
@@ -4328,7 +4363,7 @@
         </p:nvSpPr>
         <p:spPr>
           <a:xfrm>
-            <a:off x="896112" y="2029968"/>
+            <a:off x="722642" y="1297735"/>
             <a:ext cx="3520440" cy="3794760"/>
           </a:xfrm>
           <a:prstGeom prst="rect">
@@ -4341,7 +4376,7 @@
           <a:lstStyle/>
           <a:p>
             <a:r>
-              <a:rPr sz="2200" b="1" i="0">
+              <a:rPr sz="2200" b="1" i="0" dirty="0">
                 <a:solidFill>
                   <a:srgbClr val="2F2A26"/>
                 </a:solidFill>
@@ -4357,13 +4392,49 @@
               </a:spcBef>
             </a:pPr>
             <a:r>
-              <a:rPr sz="1500" b="0" i="0">
+              <a:rPr sz="1500" b="0" i="0" dirty="0">
                 <a:solidFill>
                   <a:srgbClr val="B85C42"/>
                 </a:solidFill>
                 <a:latin typeface="Calibri"/>
               </a:rPr>
-              <a:t>21 años  ·  Estudiante UPB</a:t>
+              <a:t>21 </a:t>
+            </a:r>
+            <a:r>
+              <a:rPr sz="1500" b="0" i="0" dirty="0" err="1">
+                <a:solidFill>
+                  <a:srgbClr val="B85C42"/>
+                </a:solidFill>
+                <a:latin typeface="Calibri"/>
+              </a:rPr>
+              <a:t>años</a:t>
+            </a:r>
+            <a:r>
+              <a:rPr sz="1500" b="0" i="0" dirty="0">
+                <a:solidFill>
+                  <a:srgbClr val="B85C42"/>
+                </a:solidFill>
+                <a:latin typeface="Calibri"/>
+              </a:rPr>
+              <a:t>  ·  </a:t>
+            </a:r>
+            <a:r>
+              <a:rPr sz="1500" b="0" i="0" dirty="0" err="1">
+                <a:solidFill>
+                  <a:srgbClr val="B85C42"/>
+                </a:solidFill>
+                <a:latin typeface="Calibri"/>
+              </a:rPr>
+              <a:t>Estudiante</a:t>
+            </a:r>
+            <a:r>
+              <a:rPr sz="1500" b="0" i="0" dirty="0">
+                <a:solidFill>
+                  <a:srgbClr val="B85C42"/>
+                </a:solidFill>
+                <a:latin typeface="Calibri"/>
+              </a:rPr>
+              <a:t> UPB</a:t>
             </a:r>
           </a:p>
           <a:p>
@@ -4373,14 +4444,29 @@
               </a:spcBef>
             </a:pPr>
             <a:r>
-              <a:rPr sz="1400" b="0" i="0">
+              <a:rPr sz="1400" b="0" i="0" dirty="0">
                 <a:solidFill>
                   <a:srgbClr val="6F6259"/>
                 </a:solidFill>
                 <a:latin typeface="Calibri"/>
               </a:rPr>
-              <a:t>Dulce &amp; Tela  ·  brownies y accesorios</a:t>
-            </a:r>
+              <a:t>Dulce &amp; Tela  ·  brownies y </a:t>
+            </a:r>
+            <a:r>
+              <a:rPr sz="1400" b="0" i="0" dirty="0" err="1">
+                <a:solidFill>
+                  <a:srgbClr val="6F6259"/>
+                </a:solidFill>
+                <a:latin typeface="Calibri"/>
+              </a:rPr>
+              <a:t>accesorios</a:t>
+            </a:r>
+            <a:endParaRPr sz="1400" b="0" i="0" dirty="0">
+              <a:solidFill>
+                <a:srgbClr val="6F6259"/>
+              </a:solidFill>
+              <a:latin typeface="Calibri"/>
+            </a:endParaRPr>
           </a:p>
           <a:p>
             <a:pPr>
@@ -4392,13 +4478,211 @@
               </a:spcBef>
             </a:pPr>
             <a:r>
-              <a:rPr sz="1600" b="0" i="0">
-                <a:solidFill>
-                  <a:srgbClr val="2F2A26"/>
-                </a:solidFill>
-                <a:latin typeface="Calibri"/>
-              </a:rPr>
-              <a:t>“Entre clase y clase armo un puesto. Quiero saber cuánto gané hoy y qué se me acabó, sin llevar un cuaderno.”</a:t>
+              <a:rPr sz="1600" b="0" i="0" dirty="0">
+                <a:solidFill>
+                  <a:srgbClr val="2F2A26"/>
+                </a:solidFill>
+                <a:latin typeface="Calibri"/>
+              </a:rPr>
+              <a:t>“Entre </a:t>
+            </a:r>
+            <a:r>
+              <a:rPr sz="1600" b="0" i="0" dirty="0" err="1">
+                <a:solidFill>
+                  <a:srgbClr val="2F2A26"/>
+                </a:solidFill>
+                <a:latin typeface="Calibri"/>
+              </a:rPr>
+              <a:t>clase</a:t>
+            </a:r>
+            <a:r>
+              <a:rPr sz="1600" b="0" i="0" dirty="0">
+                <a:solidFill>
+                  <a:srgbClr val="2F2A26"/>
+                </a:solidFill>
+                <a:latin typeface="Calibri"/>
+              </a:rPr>
+              <a:t> y </a:t>
+            </a:r>
+            <a:r>
+              <a:rPr sz="1600" b="0" i="0" dirty="0" err="1">
+                <a:solidFill>
+                  <a:srgbClr val="2F2A26"/>
+                </a:solidFill>
+                <a:latin typeface="Calibri"/>
+              </a:rPr>
+              <a:t>clase</a:t>
+            </a:r>
+            <a:r>
+              <a:rPr sz="1600" b="0" i="0" dirty="0">
+                <a:solidFill>
+                  <a:srgbClr val="2F2A26"/>
+                </a:solidFill>
+                <a:latin typeface="Calibri"/>
+              </a:rPr>
+              <a:t> </a:t>
+            </a:r>
+            <a:r>
+              <a:rPr sz="1600" b="0" i="0" dirty="0" err="1">
+                <a:solidFill>
+                  <a:srgbClr val="2F2A26"/>
+                </a:solidFill>
+                <a:latin typeface="Calibri"/>
+              </a:rPr>
+              <a:t>armo</a:t>
+            </a:r>
+            <a:r>
+              <a:rPr sz="1600" b="0" i="0" dirty="0">
+                <a:solidFill>
+                  <a:srgbClr val="2F2A26"/>
+                </a:solidFill>
+                <a:latin typeface="Calibri"/>
+              </a:rPr>
+              <a:t> un </a:t>
+            </a:r>
+            <a:r>
+              <a:rPr sz="1600" b="0" i="0" dirty="0" err="1">
+                <a:solidFill>
+                  <a:srgbClr val="2F2A26"/>
+                </a:solidFill>
+                <a:latin typeface="Calibri"/>
+              </a:rPr>
+              <a:t>puesto</a:t>
+            </a:r>
+            <a:r>
+              <a:rPr sz="1600" b="0" i="0" dirty="0">
+                <a:solidFill>
+                  <a:srgbClr val="2F2A26"/>
+                </a:solidFill>
+                <a:latin typeface="Calibri"/>
+              </a:rPr>
+              <a:t>. </a:t>
+            </a:r>
+            <a:r>
+              <a:rPr sz="1600" b="0" i="0" dirty="0" err="1">
+                <a:solidFill>
+                  <a:srgbClr val="2F2A26"/>
+                </a:solidFill>
+                <a:latin typeface="Calibri"/>
+              </a:rPr>
+              <a:t>Quiero</a:t>
+            </a:r>
+            <a:r>
+              <a:rPr sz="1600" b="0" i="0" dirty="0">
+                <a:solidFill>
+                  <a:srgbClr val="2F2A26"/>
+                </a:solidFill>
+                <a:latin typeface="Calibri"/>
+              </a:rPr>
+              <a:t> saber </a:t>
+            </a:r>
+            <a:r>
+              <a:rPr sz="1600" b="0" i="0" dirty="0" err="1">
+                <a:solidFill>
+                  <a:srgbClr val="2F2A26"/>
+                </a:solidFill>
+                <a:latin typeface="Calibri"/>
+              </a:rPr>
+              <a:t>cuánto</a:t>
+            </a:r>
+            <a:r>
+              <a:rPr sz="1600" b="0" i="0" dirty="0">
+                <a:solidFill>
+                  <a:srgbClr val="2F2A26"/>
+                </a:solidFill>
+                <a:latin typeface="Calibri"/>
+              </a:rPr>
+              <a:t> </a:t>
+            </a:r>
+            <a:r>
+              <a:rPr sz="1600" b="0" i="0" dirty="0" err="1">
+                <a:solidFill>
+                  <a:srgbClr val="2F2A26"/>
+                </a:solidFill>
+                <a:latin typeface="Calibri"/>
+              </a:rPr>
+              <a:t>gané</a:t>
+            </a:r>
+            <a:r>
+              <a:rPr sz="1600" b="0" i="0" dirty="0">
+                <a:solidFill>
+                  <a:srgbClr val="2F2A26"/>
+                </a:solidFill>
+                <a:latin typeface="Calibri"/>
+              </a:rPr>
+              <a:t> hoy y </a:t>
+            </a:r>
+            <a:r>
+              <a:rPr sz="1600" b="0" i="0" dirty="0" err="1">
+                <a:solidFill>
+                  <a:srgbClr val="2F2A26"/>
+                </a:solidFill>
+                <a:latin typeface="Calibri"/>
+              </a:rPr>
+              <a:t>qué</a:t>
+            </a:r>
+            <a:r>
+              <a:rPr sz="1600" b="0" i="0" dirty="0">
+                <a:solidFill>
+                  <a:srgbClr val="2F2A26"/>
+                </a:solidFill>
+                <a:latin typeface="Calibri"/>
+              </a:rPr>
+              <a:t> se me </a:t>
+            </a:r>
+            <a:r>
+              <a:rPr sz="1600" b="0" i="0" dirty="0" err="1">
+                <a:solidFill>
+                  <a:srgbClr val="2F2A26"/>
+                </a:solidFill>
+                <a:latin typeface="Calibri"/>
+              </a:rPr>
+              <a:t>acabó</a:t>
+            </a:r>
+            <a:r>
+              <a:rPr sz="1600" b="0" i="0" dirty="0">
+                <a:solidFill>
+                  <a:srgbClr val="2F2A26"/>
+                </a:solidFill>
+                <a:latin typeface="Calibri"/>
+              </a:rPr>
+              <a:t>, sin </a:t>
+            </a:r>
+            <a:r>
+              <a:rPr sz="1600" b="0" i="0" dirty="0" err="1">
+                <a:solidFill>
+                  <a:srgbClr val="2F2A26"/>
+                </a:solidFill>
+                <a:latin typeface="Calibri"/>
+              </a:rPr>
+              <a:t>llevar</a:t>
+            </a:r>
+            <a:r>
+              <a:rPr sz="1600" b="0" i="0" dirty="0">
+                <a:solidFill>
+                  <a:srgbClr val="2F2A26"/>
+                </a:solidFill>
+                <a:latin typeface="Calibri"/>
+              </a:rPr>
+              <a:t> un </a:t>
+            </a:r>
+            <a:r>
+              <a:rPr sz="1600" b="0" i="0" dirty="0" err="1">
+                <a:solidFill>
+                  <a:srgbClr val="2F2A26"/>
+                </a:solidFill>
+                <a:latin typeface="Calibri"/>
+              </a:rPr>
+              <a:t>cuaderno</a:t>
+            </a:r>
+            <a:r>
+              <a:rPr sz="1600" b="0" i="0" dirty="0">
+                <a:solidFill>
+                  <a:srgbClr val="2F2A26"/>
+                </a:solidFill>
+                <a:latin typeface="Calibri"/>
+              </a:rPr>
+              <a:t>.”</a:t>
             </a:r>
           </a:p>
         </p:txBody>
@@ -4411,7 +4695,7 @@
         </p:nvSpPr>
         <p:spPr>
           <a:xfrm>
-            <a:off x="4846320" y="1828800"/>
+            <a:off x="4776177" y="1399032"/>
             <a:ext cx="6583680" cy="1234440"/>
           </a:xfrm>
           <a:prstGeom prst="roundRect">
@@ -4445,6 +4729,7 @@
           <a:lstStyle/>
           <a:p>
             <a:pPr algn="ctr"/>
+            <a:endParaRPr/>
           </a:p>
         </p:txBody>
       </p:sp>
@@ -4456,7 +4741,7 @@
         </p:nvSpPr>
         <p:spPr>
           <a:xfrm>
-            <a:off x="5102352" y="2084832"/>
+            <a:off x="4998643" y="1455277"/>
             <a:ext cx="6126480" cy="777240"/>
           </a:xfrm>
           <a:prstGeom prst="rect">
@@ -4469,7 +4754,7 @@
           <a:lstStyle/>
           <a:p>
             <a:r>
-              <a:rPr sz="1800" b="1" i="0">
+              <a:rPr sz="1800" b="1" i="0" dirty="0">
                 <a:solidFill>
                   <a:srgbClr val="B85C42"/>
                 </a:solidFill>
@@ -4488,13 +4773,175 @@
               </a:spcBef>
             </a:pPr>
             <a:r>
-              <a:rPr sz="1500" b="0" i="0">
+              <a:rPr sz="1500" b="0" i="0" dirty="0">
                 <a:solidFill>
                   <a:srgbClr val="6F6259"/>
                 </a:solidFill>
                 <a:latin typeface="Calibri"/>
               </a:rPr>
-              <a:t>Sacar un ingreso extra en el campus sin descuidar el semestre: vender rápido, cuadrar caja y no quedarse sin producto.</a:t>
+              <a:t>Sacar un </a:t>
+            </a:r>
+            <a:r>
+              <a:rPr sz="1500" b="0" i="0" dirty="0" err="1">
+                <a:solidFill>
+                  <a:srgbClr val="6F6259"/>
+                </a:solidFill>
+                <a:latin typeface="Calibri"/>
+              </a:rPr>
+              <a:t>ingreso</a:t>
+            </a:r>
+            <a:r>
+              <a:rPr sz="1500" b="0" i="0" dirty="0">
+                <a:solidFill>
+                  <a:srgbClr val="6F6259"/>
+                </a:solidFill>
+                <a:latin typeface="Calibri"/>
+              </a:rPr>
+              <a:t> extra </a:t>
+            </a:r>
+            <a:r>
+              <a:rPr sz="1500" b="0" i="0" dirty="0" err="1">
+                <a:solidFill>
+                  <a:srgbClr val="6F6259"/>
+                </a:solidFill>
+                <a:latin typeface="Calibri"/>
+              </a:rPr>
+              <a:t>en</a:t>
+            </a:r>
+            <a:r>
+              <a:rPr sz="1500" b="0" i="0" dirty="0">
+                <a:solidFill>
+                  <a:srgbClr val="6F6259"/>
+                </a:solidFill>
+                <a:latin typeface="Calibri"/>
+              </a:rPr>
+              <a:t> el campus sin </a:t>
+            </a:r>
+            <a:r>
+              <a:rPr sz="1500" b="0" i="0" dirty="0" err="1">
+                <a:solidFill>
+                  <a:srgbClr val="6F6259"/>
+                </a:solidFill>
+                <a:latin typeface="Calibri"/>
+              </a:rPr>
+              <a:t>descuidar</a:t>
+            </a:r>
+            <a:r>
+              <a:rPr sz="1500" b="0" i="0" dirty="0">
+                <a:solidFill>
+                  <a:srgbClr val="6F6259"/>
+                </a:solidFill>
+                <a:latin typeface="Calibri"/>
+              </a:rPr>
+              <a:t> el </a:t>
+            </a:r>
+            <a:r>
+              <a:rPr sz="1500" b="0" i="0" dirty="0" err="1">
+                <a:solidFill>
+                  <a:srgbClr val="6F6259"/>
+                </a:solidFill>
+                <a:latin typeface="Calibri"/>
+              </a:rPr>
+              <a:t>semestre</a:t>
+            </a:r>
+            <a:r>
+              <a:rPr sz="1500" b="0" i="0" dirty="0">
+                <a:solidFill>
+                  <a:srgbClr val="6F6259"/>
+                </a:solidFill>
+                <a:latin typeface="Calibri"/>
+              </a:rPr>
+              <a:t>: vender </a:t>
+            </a:r>
+            <a:r>
+              <a:rPr sz="1500" b="0" i="0" dirty="0" err="1">
+                <a:solidFill>
+                  <a:srgbClr val="6F6259"/>
+                </a:solidFill>
+                <a:latin typeface="Calibri"/>
+              </a:rPr>
+              <a:t>rápido</a:t>
+            </a:r>
+            <a:r>
+              <a:rPr sz="1500" b="0" i="0" dirty="0">
+                <a:solidFill>
+                  <a:srgbClr val="6F6259"/>
+                </a:solidFill>
+                <a:latin typeface="Calibri"/>
+              </a:rPr>
+              <a:t>, </a:t>
+            </a:r>
+            <a:r>
+              <a:rPr sz="1500" b="0" i="0" dirty="0" err="1">
+                <a:solidFill>
+                  <a:srgbClr val="6F6259"/>
+                </a:solidFill>
+                <a:latin typeface="Calibri"/>
+              </a:rPr>
+              <a:t>cuadrar</a:t>
+            </a:r>
+            <a:r>
+              <a:rPr sz="1500" b="0" i="0" dirty="0">
+                <a:solidFill>
+                  <a:srgbClr val="6F6259"/>
+                </a:solidFill>
+                <a:latin typeface="Calibri"/>
+              </a:rPr>
+              <a:t> </a:t>
+            </a:r>
+            <a:r>
+              <a:rPr sz="1500" b="0" i="0" dirty="0" err="1">
+                <a:solidFill>
+                  <a:srgbClr val="6F6259"/>
+                </a:solidFill>
+                <a:latin typeface="Calibri"/>
+              </a:rPr>
+              <a:t>caja</a:t>
+            </a:r>
+            <a:r>
+              <a:rPr sz="1500" b="0" i="0" dirty="0">
+                <a:solidFill>
+                  <a:srgbClr val="6F6259"/>
+                </a:solidFill>
+                <a:latin typeface="Calibri"/>
+              </a:rPr>
+              <a:t> y no </a:t>
+            </a:r>
+            <a:r>
+              <a:rPr sz="1500" b="0" i="0" dirty="0" err="1">
+                <a:solidFill>
+                  <a:srgbClr val="6F6259"/>
+                </a:solidFill>
+                <a:latin typeface="Calibri"/>
+              </a:rPr>
+              <a:t>quedarse</a:t>
+            </a:r>
+            <a:r>
+              <a:rPr sz="1500" b="0" i="0" dirty="0">
+                <a:solidFill>
+                  <a:srgbClr val="6F6259"/>
+                </a:solidFill>
+                <a:latin typeface="Calibri"/>
+              </a:rPr>
+              <a:t> sin </a:t>
+            </a:r>
+            <a:r>
+              <a:rPr sz="1500" b="0" i="0" dirty="0" err="1">
+                <a:solidFill>
+                  <a:srgbClr val="6F6259"/>
+                </a:solidFill>
+                <a:latin typeface="Calibri"/>
+              </a:rPr>
+              <a:t>producto</a:t>
+            </a:r>
+            <a:r>
+              <a:rPr sz="1500" b="0" i="0" dirty="0">
+                <a:solidFill>
+                  <a:srgbClr val="6F6259"/>
+                </a:solidFill>
+                <a:latin typeface="Calibri"/>
+              </a:rPr>
+              <a:t>.</a:t>
             </a:r>
           </a:p>
         </p:txBody>
@@ -4507,7 +4954,7 @@
         </p:nvSpPr>
         <p:spPr>
           <a:xfrm>
-            <a:off x="4846320" y="3200400"/>
+            <a:off x="4776177" y="2816352"/>
             <a:ext cx="6583680" cy="1280160"/>
           </a:xfrm>
           <a:prstGeom prst="roundRect">
@@ -4541,6 +4988,7 @@
           <a:lstStyle/>
           <a:p>
             <a:pPr algn="ctr"/>
+            <a:endParaRPr/>
           </a:p>
         </p:txBody>
       </p:sp>
@@ -4552,7 +5000,7 @@
         </p:nvSpPr>
         <p:spPr>
           <a:xfrm>
-            <a:off x="5102352" y="3456432"/>
+            <a:off x="4998643" y="2938669"/>
             <a:ext cx="6126480" cy="822959"/>
           </a:xfrm>
           <a:prstGeom prst="rect">
@@ -4565,7 +5013,7 @@
           <a:lstStyle/>
           <a:p>
             <a:r>
-              <a:rPr sz="1800" b="1" i="0">
+              <a:rPr sz="1800" b="1" i="0" dirty="0" err="1">
                 <a:solidFill>
                   <a:srgbClr val="B85C42"/>
                 </a:solidFill>
@@ -4573,6 +5021,12 @@
               </a:rPr>
               <a:t>Frustración</a:t>
             </a:r>
+            <a:endParaRPr sz="1800" b="1" i="0" dirty="0">
+              <a:solidFill>
+                <a:srgbClr val="B85C42"/>
+              </a:solidFill>
+              <a:latin typeface="Calibri"/>
+            </a:endParaRPr>
           </a:p>
           <a:p>
             <a:pPr>
@@ -4584,13 +5038,184 @@
               </a:spcBef>
             </a:pPr>
             <a:r>
-              <a:rPr sz="1500" b="0" i="0">
+              <a:rPr sz="1500" b="0" i="0" dirty="0" err="1">
                 <a:solidFill>
                   <a:srgbClr val="6F6259"/>
                 </a:solidFill>
                 <a:latin typeface="Calibri"/>
               </a:rPr>
-              <a:t>Anota ventas en WhatsApp o de memoria. En el pico del descanso se le olvida restar stock y al final no sabe si le alcanzó para reponer.</a:t>
+              <a:t>Anota</a:t>
+            </a:r>
+            <a:r>
+              <a:rPr sz="1500" b="0" i="0" dirty="0">
+                <a:solidFill>
+                  <a:srgbClr val="6F6259"/>
+                </a:solidFill>
+                <a:latin typeface="Calibri"/>
+              </a:rPr>
+              <a:t> </a:t>
+            </a:r>
+            <a:r>
+              <a:rPr sz="1500" b="0" i="0" dirty="0" err="1">
+                <a:solidFill>
+                  <a:srgbClr val="6F6259"/>
+                </a:solidFill>
+                <a:latin typeface="Calibri"/>
+              </a:rPr>
+              <a:t>ventas</a:t>
+            </a:r>
+            <a:r>
+              <a:rPr sz="1500" b="0" i="0" dirty="0">
+                <a:solidFill>
+                  <a:srgbClr val="6F6259"/>
+                </a:solidFill>
+                <a:latin typeface="Calibri"/>
+              </a:rPr>
+              <a:t> </a:t>
+            </a:r>
+            <a:r>
+              <a:rPr sz="1500" b="0" i="0" dirty="0" err="1">
+                <a:solidFill>
+                  <a:srgbClr val="6F6259"/>
+                </a:solidFill>
+                <a:latin typeface="Calibri"/>
+              </a:rPr>
+              <a:t>en</a:t>
+            </a:r>
+            <a:r>
+              <a:rPr sz="1500" b="0" i="0" dirty="0">
+                <a:solidFill>
+                  <a:srgbClr val="6F6259"/>
+                </a:solidFill>
+                <a:latin typeface="Calibri"/>
+              </a:rPr>
+              <a:t> WhatsApp o de memoria. En el </a:t>
+            </a:r>
+            <a:r>
+              <a:rPr sz="1500" b="0" i="0" dirty="0" err="1">
+                <a:solidFill>
+                  <a:srgbClr val="6F6259"/>
+                </a:solidFill>
+                <a:latin typeface="Calibri"/>
+              </a:rPr>
+              <a:t>pico</a:t>
+            </a:r>
+            <a:r>
+              <a:rPr sz="1500" b="0" i="0" dirty="0">
+                <a:solidFill>
+                  <a:srgbClr val="6F6259"/>
+                </a:solidFill>
+                <a:latin typeface="Calibri"/>
+              </a:rPr>
+              <a:t> del </a:t>
+            </a:r>
+            <a:r>
+              <a:rPr sz="1500" b="0" i="0" dirty="0" err="1">
+                <a:solidFill>
+                  <a:srgbClr val="6F6259"/>
+                </a:solidFill>
+                <a:latin typeface="Calibri"/>
+              </a:rPr>
+              <a:t>descanso</a:t>
+            </a:r>
+            <a:r>
+              <a:rPr sz="1500" b="0" i="0" dirty="0">
+                <a:solidFill>
+                  <a:srgbClr val="6F6259"/>
+                </a:solidFill>
+                <a:latin typeface="Calibri"/>
+              </a:rPr>
+              <a:t> se le </a:t>
+            </a:r>
+            <a:r>
+              <a:rPr sz="1500" b="0" i="0" dirty="0" err="1">
+                <a:solidFill>
+                  <a:srgbClr val="6F6259"/>
+                </a:solidFill>
+                <a:latin typeface="Calibri"/>
+              </a:rPr>
+              <a:t>olvida</a:t>
+            </a:r>
+            <a:r>
+              <a:rPr sz="1500" b="0" i="0" dirty="0">
+                <a:solidFill>
+                  <a:srgbClr val="6F6259"/>
+                </a:solidFill>
+                <a:latin typeface="Calibri"/>
+              </a:rPr>
+              <a:t> </a:t>
+            </a:r>
+            <a:r>
+              <a:rPr sz="1500" b="0" i="0" dirty="0" err="1">
+                <a:solidFill>
+                  <a:srgbClr val="6F6259"/>
+                </a:solidFill>
+                <a:latin typeface="Calibri"/>
+              </a:rPr>
+              <a:t>restar</a:t>
+            </a:r>
+            <a:r>
+              <a:rPr sz="1500" b="0" i="0" dirty="0">
+                <a:solidFill>
+                  <a:srgbClr val="6F6259"/>
+                </a:solidFill>
+                <a:latin typeface="Calibri"/>
+              </a:rPr>
+              <a:t> stock y al final no sabe </a:t>
+            </a:r>
+            <a:r>
+              <a:rPr sz="1500" b="0" i="0" dirty="0" err="1">
+                <a:solidFill>
+                  <a:srgbClr val="6F6259"/>
+                </a:solidFill>
+                <a:latin typeface="Calibri"/>
+              </a:rPr>
+              <a:t>si</a:t>
+            </a:r>
+            <a:r>
+              <a:rPr sz="1500" b="0" i="0" dirty="0">
+                <a:solidFill>
+                  <a:srgbClr val="6F6259"/>
+                </a:solidFill>
+                <a:latin typeface="Calibri"/>
+              </a:rPr>
+              <a:t> le </a:t>
+            </a:r>
+            <a:r>
+              <a:rPr sz="1500" b="0" i="0" dirty="0" err="1">
+                <a:solidFill>
+                  <a:srgbClr val="6F6259"/>
+                </a:solidFill>
+                <a:latin typeface="Calibri"/>
+              </a:rPr>
+              <a:t>alcanzó</a:t>
+            </a:r>
+            <a:r>
+              <a:rPr sz="1500" b="0" i="0" dirty="0">
+                <a:solidFill>
+                  <a:srgbClr val="6F6259"/>
+                </a:solidFill>
+                <a:latin typeface="Calibri"/>
+              </a:rPr>
+              <a:t> para </a:t>
+            </a:r>
+            <a:r>
+              <a:rPr sz="1500" b="0" i="0" dirty="0" err="1">
+                <a:solidFill>
+                  <a:srgbClr val="6F6259"/>
+                </a:solidFill>
+                <a:latin typeface="Calibri"/>
+              </a:rPr>
+              <a:t>reponer</a:t>
+            </a:r>
+            <a:r>
+              <a:rPr sz="1500" b="0" i="0" dirty="0">
+                <a:solidFill>
+                  <a:srgbClr val="6F6259"/>
+                </a:solidFill>
+                <a:latin typeface="Calibri"/>
+              </a:rPr>
+              <a:t>.</a:t>
             </a:r>
           </a:p>
         </p:txBody>
@@ -4603,7 +5228,7 @@
         </p:nvSpPr>
         <p:spPr>
           <a:xfrm>
-            <a:off x="4846320" y="4617720"/>
+            <a:off x="4799664" y="4279392"/>
             <a:ext cx="6583680" cy="1371600"/>
           </a:xfrm>
           <a:prstGeom prst="roundRect">
@@ -4637,6 +5262,7 @@
           <a:lstStyle/>
           <a:p>
             <a:pPr algn="ctr"/>
+            <a:endParaRPr/>
           </a:p>
         </p:txBody>
       </p:sp>
@@ -4648,7 +5274,7 @@
         </p:nvSpPr>
         <p:spPr>
           <a:xfrm>
-            <a:off x="5102352" y="4873752"/>
+            <a:off x="4998643" y="4488323"/>
             <a:ext cx="6126480" cy="914400"/>
           </a:xfrm>
           <a:prstGeom prst="rect">
@@ -4661,14 +5287,56 @@
           <a:lstStyle/>
           <a:p>
             <a:r>
-              <a:rPr sz="1800" b="1" i="0">
+              <a:rPr sz="1800" b="1" i="0" dirty="0" err="1">
                 <a:solidFill>
                   <a:srgbClr val="B85C42"/>
                 </a:solidFill>
                 <a:latin typeface="Calibri"/>
               </a:rPr>
-              <a:t>Qué necesita de UPVenta</a:t>
-            </a:r>
+              <a:t>Qué</a:t>
+            </a:r>
+            <a:r>
+              <a:rPr sz="1800" b="1" i="0" dirty="0">
+                <a:solidFill>
+                  <a:srgbClr val="B85C42"/>
+                </a:solidFill>
+                <a:latin typeface="Calibri"/>
+              </a:rPr>
+              <a:t> </a:t>
+            </a:r>
+            <a:r>
+              <a:rPr sz="1800" b="1" i="0" dirty="0" err="1">
+                <a:solidFill>
+                  <a:srgbClr val="B85C42"/>
+                </a:solidFill>
+                <a:latin typeface="Calibri"/>
+              </a:rPr>
+              <a:t>necesita</a:t>
+            </a:r>
+            <a:r>
+              <a:rPr sz="1800" b="1" i="0" dirty="0">
+                <a:solidFill>
+                  <a:srgbClr val="B85C42"/>
+                </a:solidFill>
+                <a:latin typeface="Calibri"/>
+              </a:rPr>
+              <a:t> de </a:t>
+            </a:r>
+            <a:r>
+              <a:rPr sz="1800" b="1" i="0" dirty="0" err="1">
+                <a:solidFill>
+                  <a:srgbClr val="B85C42"/>
+                </a:solidFill>
+                <a:latin typeface="Calibri"/>
+              </a:rPr>
+              <a:t>UPVenta</a:t>
+            </a:r>
+            <a:endParaRPr sz="1800" b="1" i="0" dirty="0">
+              <a:solidFill>
+                <a:srgbClr val="B85C42"/>
+              </a:solidFill>
+              <a:latin typeface="Calibri"/>
+            </a:endParaRPr>
           </a:p>
           <a:p>
             <a:pPr>
@@ -4680,17 +5348,273 @@
               </a:spcBef>
             </a:pPr>
             <a:r>
-              <a:rPr sz="1500" b="0" i="0">
+              <a:rPr sz="1500" b="0" i="0" dirty="0" err="1">
                 <a:solidFill>
                   <a:srgbClr val="6F6259"/>
                 </a:solidFill>
                 <a:latin typeface="Calibri"/>
               </a:rPr>
-              <a:t>Entrar con su usuario, cargar el catálogo una vez y registrar cada venta en el celular. Alertas de stock bajo y un resumen del día.</a:t>
-            </a:r>
-          </a:p>
-        </p:txBody>
-      </p:sp>
+              <a:t>Entrar</a:t>
+            </a:r>
+            <a:r>
+              <a:rPr sz="1500" b="0" i="0" dirty="0">
+                <a:solidFill>
+                  <a:srgbClr val="6F6259"/>
+                </a:solidFill>
+                <a:latin typeface="Calibri"/>
+              </a:rPr>
+              <a:t> con </a:t>
+            </a:r>
+            <a:r>
+              <a:rPr sz="1500" b="0" i="0" dirty="0" err="1">
+                <a:solidFill>
+                  <a:srgbClr val="6F6259"/>
+                </a:solidFill>
+                <a:latin typeface="Calibri"/>
+              </a:rPr>
+              <a:t>su</a:t>
+            </a:r>
+            <a:r>
+              <a:rPr sz="1500" b="0" i="0" dirty="0">
+                <a:solidFill>
+                  <a:srgbClr val="6F6259"/>
+                </a:solidFill>
+                <a:latin typeface="Calibri"/>
+              </a:rPr>
+              <a:t> </a:t>
+            </a:r>
+            <a:r>
+              <a:rPr sz="1500" b="0" i="0" dirty="0" err="1">
+                <a:solidFill>
+                  <a:srgbClr val="6F6259"/>
+                </a:solidFill>
+                <a:latin typeface="Calibri"/>
+              </a:rPr>
+              <a:t>usuario</a:t>
+            </a:r>
+            <a:r>
+              <a:rPr sz="1500" b="0" i="0" dirty="0">
+                <a:solidFill>
+                  <a:srgbClr val="6F6259"/>
+                </a:solidFill>
+                <a:latin typeface="Calibri"/>
+              </a:rPr>
+              <a:t>, </a:t>
+            </a:r>
+            <a:r>
+              <a:rPr sz="1500" b="0" i="0" dirty="0" err="1">
+                <a:solidFill>
+                  <a:srgbClr val="6F6259"/>
+                </a:solidFill>
+                <a:latin typeface="Calibri"/>
+              </a:rPr>
+              <a:t>cargar</a:t>
+            </a:r>
+            <a:r>
+              <a:rPr sz="1500" b="0" i="0" dirty="0">
+                <a:solidFill>
+                  <a:srgbClr val="6F6259"/>
+                </a:solidFill>
+                <a:latin typeface="Calibri"/>
+              </a:rPr>
+              <a:t> el </a:t>
+            </a:r>
+            <a:r>
+              <a:rPr sz="1500" b="0" i="0" dirty="0" err="1">
+                <a:solidFill>
+                  <a:srgbClr val="6F6259"/>
+                </a:solidFill>
+                <a:latin typeface="Calibri"/>
+              </a:rPr>
+              <a:t>catálogo</a:t>
+            </a:r>
+            <a:r>
+              <a:rPr sz="1500" b="0" i="0" dirty="0">
+                <a:solidFill>
+                  <a:srgbClr val="6F6259"/>
+                </a:solidFill>
+                <a:latin typeface="Calibri"/>
+              </a:rPr>
+              <a:t> </a:t>
+            </a:r>
+            <a:r>
+              <a:rPr sz="1500" b="0" i="0" dirty="0" err="1">
+                <a:solidFill>
+                  <a:srgbClr val="6F6259"/>
+                </a:solidFill>
+                <a:latin typeface="Calibri"/>
+              </a:rPr>
+              <a:t>una</a:t>
+            </a:r>
+            <a:r>
+              <a:rPr sz="1500" b="0" i="0" dirty="0">
+                <a:solidFill>
+                  <a:srgbClr val="6F6259"/>
+                </a:solidFill>
+                <a:latin typeface="Calibri"/>
+              </a:rPr>
+              <a:t> </a:t>
+            </a:r>
+            <a:r>
+              <a:rPr sz="1500" b="0" i="0" dirty="0" err="1">
+                <a:solidFill>
+                  <a:srgbClr val="6F6259"/>
+                </a:solidFill>
+                <a:latin typeface="Calibri"/>
+              </a:rPr>
+              <a:t>vez</a:t>
+            </a:r>
+            <a:r>
+              <a:rPr sz="1500" b="0" i="0" dirty="0">
+                <a:solidFill>
+                  <a:srgbClr val="6F6259"/>
+                </a:solidFill>
+                <a:latin typeface="Calibri"/>
+              </a:rPr>
+              <a:t> y registrar </a:t>
+            </a:r>
+            <a:r>
+              <a:rPr sz="1500" b="0" i="0" dirty="0" err="1">
+                <a:solidFill>
+                  <a:srgbClr val="6F6259"/>
+                </a:solidFill>
+                <a:latin typeface="Calibri"/>
+              </a:rPr>
+              <a:t>cada</a:t>
+            </a:r>
+            <a:r>
+              <a:rPr sz="1500" b="0" i="0" dirty="0">
+                <a:solidFill>
+                  <a:srgbClr val="6F6259"/>
+                </a:solidFill>
+                <a:latin typeface="Calibri"/>
+              </a:rPr>
+              <a:t> </a:t>
+            </a:r>
+            <a:r>
+              <a:rPr sz="1500" b="0" i="0" dirty="0" err="1">
+                <a:solidFill>
+                  <a:srgbClr val="6F6259"/>
+                </a:solidFill>
+                <a:latin typeface="Calibri"/>
+              </a:rPr>
+              <a:t>venta</a:t>
+            </a:r>
+            <a:r>
+              <a:rPr sz="1500" b="0" i="0" dirty="0">
+                <a:solidFill>
+                  <a:srgbClr val="6F6259"/>
+                </a:solidFill>
+                <a:latin typeface="Calibri"/>
+              </a:rPr>
+              <a:t> </a:t>
+            </a:r>
+            <a:r>
+              <a:rPr sz="1500" b="0" i="0" dirty="0" err="1">
+                <a:solidFill>
+                  <a:srgbClr val="6F6259"/>
+                </a:solidFill>
+                <a:latin typeface="Calibri"/>
+              </a:rPr>
+              <a:t>en</a:t>
+            </a:r>
+            <a:r>
+              <a:rPr sz="1500" b="0" i="0" dirty="0">
+                <a:solidFill>
+                  <a:srgbClr val="6F6259"/>
+                </a:solidFill>
+                <a:latin typeface="Calibri"/>
+              </a:rPr>
+              <a:t> el </a:t>
+            </a:r>
+            <a:r>
+              <a:rPr sz="1500" b="0" i="0" dirty="0" err="1">
+                <a:solidFill>
+                  <a:srgbClr val="6F6259"/>
+                </a:solidFill>
+                <a:latin typeface="Calibri"/>
+              </a:rPr>
+              <a:t>celular</a:t>
+            </a:r>
+            <a:r>
+              <a:rPr sz="1500" b="0" i="0" dirty="0">
+                <a:solidFill>
+                  <a:srgbClr val="6F6259"/>
+                </a:solidFill>
+                <a:latin typeface="Calibri"/>
+              </a:rPr>
+              <a:t>. </a:t>
+            </a:r>
+            <a:r>
+              <a:rPr sz="1500" b="0" i="0" dirty="0" err="1">
+                <a:solidFill>
+                  <a:srgbClr val="6F6259"/>
+                </a:solidFill>
+                <a:latin typeface="Calibri"/>
+              </a:rPr>
+              <a:t>Alertas</a:t>
+            </a:r>
+            <a:r>
+              <a:rPr sz="1500" b="0" i="0" dirty="0">
+                <a:solidFill>
+                  <a:srgbClr val="6F6259"/>
+                </a:solidFill>
+                <a:latin typeface="Calibri"/>
+              </a:rPr>
+              <a:t> de stock bajo y un </a:t>
+            </a:r>
+            <a:r>
+              <a:rPr sz="1500" b="0" i="0" dirty="0" err="1">
+                <a:solidFill>
+                  <a:srgbClr val="6F6259"/>
+                </a:solidFill>
+                <a:latin typeface="Calibri"/>
+              </a:rPr>
+              <a:t>resumen</a:t>
+            </a:r>
+            <a:r>
+              <a:rPr sz="1500" b="0" i="0" dirty="0">
+                <a:solidFill>
+                  <a:srgbClr val="6F6259"/>
+                </a:solidFill>
+                <a:latin typeface="Calibri"/>
+              </a:rPr>
+              <a:t> del día.</a:t>
+            </a:r>
+          </a:p>
+        </p:txBody>
+      </p:sp>
+      <p:pic>
+        <p:nvPicPr>
+          <p:cNvPr id="14" name="Picture 13" descr="Fotos de Hermosa estudiante japonesa 21 años - Descarga fotos gratis de  gran calidad | Magnific (antes Freepik)">
+            <a:extLst>
+              <a:ext uri="{FF2B5EF4-FFF2-40B4-BE49-F238E27FC236}">
+                <a16:creationId xmlns:a16="http://schemas.microsoft.com/office/drawing/2014/main" id="{723F6B59-F01A-788E-0B09-E74E621F4126}"/>
+              </a:ext>
+            </a:extLst>
+          </p:cNvPr>
+          <p:cNvPicPr>
+            <a:picLocks noChangeAspect="1"/>
+          </p:cNvPicPr>
+          <p:nvPr/>
+        </p:nvPicPr>
+        <p:blipFill>
+          <a:blip r:embed="rId2"/>
+          <a:srcRect t="13391"/>
+          <a:stretch>
+            <a:fillRect/>
+          </a:stretch>
+        </p:blipFill>
+        <p:spPr>
+          <a:xfrm>
+            <a:off x="1279224" y="3550635"/>
+            <a:ext cx="2367244" cy="3083719"/>
+          </a:xfrm>
+          <a:prstGeom prst="rect">
+            <a:avLst/>
+          </a:prstGeom>
+        </p:spPr>
+      </p:pic>
     </p:spTree>
   </p:cSld>
   <p:clrMapOvr>
@@ -4700,7 +5624,7 @@
 </file>
 
 <file path=ppt/slides/slide5.xml><?xml version="1.0" encoding="utf-8"?>
-<p:sld xmlns:a="http://schemas.openxmlformats.org/drawingml/2006/main" xmlns:p="http://schemas.openxmlformats.org/presentationml/2006/main" xmlns:r="http://schemas.openxmlformats.org/officeDocument/2006/relationships">
+<p:sld xmlns:a="http://schemas.openxmlformats.org/drawingml/2006/main" xmlns:r="http://schemas.openxmlformats.org/officeDocument/2006/relationships" xmlns:p="http://schemas.openxmlformats.org/presentationml/2006/main">
   <p:cSld>
     <p:spTree>
       <p:nvGrpSpPr>
@@ -4708,7 +5632,14 @@
         <p:cNvGrpSpPr/>
         <p:nvPr/>
       </p:nvGrpSpPr>
-      <p:grpSpPr/>
+      <p:grpSpPr>
+        <a:xfrm>
+          <a:off x="0" y="0"/>
+          <a:ext cx="0" cy="0"/>
+          <a:chOff x="0" y="0"/>
+          <a:chExt cx="0" cy="0"/>
+        </a:xfrm>
+      </p:grpSpPr>
       <p:sp>
         <p:nvSpPr>
           <p:cNvPr id="2" name="Rectangle 1"/>
@@ -4749,6 +5680,7 @@
           <a:lstStyle/>
           <a:p>
             <a:pPr algn="ctr"/>
+            <a:endParaRPr/>
           </a:p>
         </p:txBody>
       </p:sp>
@@ -4792,6 +5724,7 @@
           <a:lstStyle/>
           <a:p>
             <a:pPr algn="ctr"/>
+            <a:endParaRPr/>
           </a:p>
         </p:txBody>
       </p:sp>
@@ -4895,7 +5828,133 @@
                 </a:solidFill>
                 <a:latin typeface="Calibri"/>
               </a:rPr>
-              <a:t>Alta y edición de productos: nombre, categoría, precio, unidad, stock y umbral mínimo.</a:t>
+              <a:t>Alta </a:t>
+            </a:r>
+            <a:r>
+              <a:rPr sz="1900" b="0" i="0" dirty="0" err="1">
+                <a:solidFill>
+                  <a:srgbClr val="2F2A26"/>
+                </a:solidFill>
+                <a:latin typeface="Calibri"/>
+              </a:rPr>
+              <a:t>edición</a:t>
+            </a:r>
+            <a:r>
+              <a:rPr sz="1900" b="0" i="0" dirty="0">
+                <a:solidFill>
+                  <a:srgbClr val="2F2A26"/>
+                </a:solidFill>
+                <a:latin typeface="Calibri"/>
+              </a:rPr>
+              <a:t> de </a:t>
+            </a:r>
+            <a:r>
+              <a:rPr sz="1900" b="0" i="0" dirty="0" err="1">
+                <a:solidFill>
+                  <a:srgbClr val="2F2A26"/>
+                </a:solidFill>
+                <a:latin typeface="Calibri"/>
+              </a:rPr>
+              <a:t>productos</a:t>
+            </a:r>
+            <a:r>
+              <a:rPr sz="1900" b="0" i="0" dirty="0">
+                <a:solidFill>
+                  <a:srgbClr val="2F2A26"/>
+                </a:solidFill>
+                <a:latin typeface="Calibri"/>
+              </a:rPr>
+              <a:t>: </a:t>
+            </a:r>
+            <a:r>
+              <a:rPr sz="1900" b="0" i="0" dirty="0" err="1">
+                <a:solidFill>
+                  <a:srgbClr val="2F2A26"/>
+                </a:solidFill>
+                <a:latin typeface="Calibri"/>
+              </a:rPr>
+              <a:t>nombre</a:t>
+            </a:r>
+            <a:r>
+              <a:rPr sz="1900" b="0" i="0" dirty="0">
+                <a:solidFill>
+                  <a:srgbClr val="2F2A26"/>
+                </a:solidFill>
+                <a:latin typeface="Calibri"/>
+              </a:rPr>
+              <a:t>, </a:t>
+            </a:r>
+            <a:r>
+              <a:rPr sz="1900" b="0" i="0" dirty="0" err="1">
+                <a:solidFill>
+                  <a:srgbClr val="2F2A26"/>
+                </a:solidFill>
+                <a:latin typeface="Calibri"/>
+              </a:rPr>
+              <a:t>categoría</a:t>
+            </a:r>
+            <a:r>
+              <a:rPr sz="1900" b="0" i="0" dirty="0">
+                <a:solidFill>
+                  <a:srgbClr val="2F2A26"/>
+                </a:solidFill>
+                <a:latin typeface="Calibri"/>
+              </a:rPr>
+              <a:t>, </a:t>
+            </a:r>
+            <a:r>
+              <a:rPr sz="1900" b="0" i="0" dirty="0" err="1">
+                <a:solidFill>
+                  <a:srgbClr val="2F2A26"/>
+                </a:solidFill>
+                <a:latin typeface="Calibri"/>
+              </a:rPr>
+              <a:t>precio</a:t>
+            </a:r>
+            <a:r>
+              <a:rPr sz="1900" b="0" i="0" dirty="0">
+                <a:solidFill>
+                  <a:srgbClr val="2F2A26"/>
+                </a:solidFill>
+                <a:latin typeface="Calibri"/>
+              </a:rPr>
+              <a:t>, </a:t>
+            </a:r>
+            <a:r>
+              <a:rPr sz="1900" b="0" i="0" dirty="0" err="1">
+                <a:solidFill>
+                  <a:srgbClr val="2F2A26"/>
+                </a:solidFill>
+                <a:latin typeface="Calibri"/>
+              </a:rPr>
+              <a:t>unidad</a:t>
+            </a:r>
+            <a:r>
+              <a:rPr sz="1900" b="0" i="0" dirty="0">
+                <a:solidFill>
+                  <a:srgbClr val="2F2A26"/>
+                </a:solidFill>
+                <a:latin typeface="Calibri"/>
+              </a:rPr>
+              <a:t>, stock y umbral </a:t>
+            </a:r>
+            <a:r>
+              <a:rPr sz="1900" b="0" i="0" dirty="0" err="1">
+                <a:solidFill>
+                  <a:srgbClr val="2F2A26"/>
+                </a:solidFill>
+                <a:latin typeface="Calibri"/>
+              </a:rPr>
+              <a:t>mínimo</a:t>
+            </a:r>
+            <a:r>
+              <a:rPr sz="1900" b="0" i="0" dirty="0">
+                <a:solidFill>
+                  <a:srgbClr val="2F2A26"/>
+                </a:solidFill>
+                <a:latin typeface="Calibri"/>
+              </a:rPr>
+              <a:t>.</a:t>
             </a:r>
           </a:p>
           <a:p>
@@ -4908,13 +5967,148 @@
               </a:spcAft>
             </a:pPr>
             <a:r>
-              <a:rPr sz="1900" b="0" i="0">
-                <a:solidFill>
-                  <a:srgbClr val="2F2A26"/>
-                </a:solidFill>
-                <a:latin typeface="Calibri"/>
-              </a:rPr>
-              <a:t>Búsqueda y filtros (postres, ropa, accesorios…) para encontrar rápido en un catálogo grande.</a:t>
+              <a:rPr sz="1900" b="0" i="0" dirty="0" err="1">
+                <a:solidFill>
+                  <a:srgbClr val="2F2A26"/>
+                </a:solidFill>
+                <a:latin typeface="Calibri"/>
+              </a:rPr>
+              <a:t>Búsqueda</a:t>
+            </a:r>
+            <a:r>
+              <a:rPr sz="1900" b="0" i="0" dirty="0">
+                <a:solidFill>
+                  <a:srgbClr val="2F2A26"/>
+                </a:solidFill>
+                <a:latin typeface="Calibri"/>
+              </a:rPr>
+              <a:t> y </a:t>
+            </a:r>
+            <a:r>
+              <a:rPr sz="1900" b="0" i="0" dirty="0" err="1">
+                <a:solidFill>
+                  <a:srgbClr val="2F2A26"/>
+                </a:solidFill>
+                <a:latin typeface="Calibri"/>
+              </a:rPr>
+              <a:t>filtros</a:t>
+            </a:r>
+            <a:r>
+              <a:rPr sz="1900" b="0" i="0" dirty="0">
+                <a:solidFill>
+                  <a:srgbClr val="2F2A26"/>
+                </a:solidFill>
+                <a:latin typeface="Calibri"/>
+              </a:rPr>
+              <a:t> (</a:t>
+            </a:r>
+            <a:r>
+              <a:rPr sz="1900" b="0" i="0" dirty="0" err="1">
+                <a:solidFill>
+                  <a:srgbClr val="2F2A26"/>
+                </a:solidFill>
+                <a:latin typeface="Calibri"/>
+              </a:rPr>
+              <a:t>postres</a:t>
+            </a:r>
+            <a:r>
+              <a:rPr sz="1900" b="0" i="0" dirty="0">
+                <a:solidFill>
+                  <a:srgbClr val="2F2A26"/>
+                </a:solidFill>
+                <a:latin typeface="Calibri"/>
+              </a:rPr>
+              <a:t>, </a:t>
+            </a:r>
+            <a:r>
+              <a:rPr sz="1900" b="0" i="0" dirty="0" err="1">
+                <a:solidFill>
+                  <a:srgbClr val="2F2A26"/>
+                </a:solidFill>
+                <a:latin typeface="Calibri"/>
+              </a:rPr>
+              <a:t>ropa</a:t>
+            </a:r>
+            <a:r>
+              <a:rPr sz="1900" b="0" i="0" dirty="0">
+                <a:solidFill>
+                  <a:srgbClr val="2F2A26"/>
+                </a:solidFill>
+                <a:latin typeface="Calibri"/>
+              </a:rPr>
+              <a:t>, </a:t>
+            </a:r>
+            <a:r>
+              <a:rPr sz="1900" b="0" i="0" dirty="0" err="1">
+                <a:solidFill>
+                  <a:srgbClr val="2F2A26"/>
+                </a:solidFill>
+                <a:latin typeface="Calibri"/>
+              </a:rPr>
+              <a:t>accesorios</a:t>
+            </a:r>
+            <a:r>
+              <a:rPr sz="1900" b="0" i="0" dirty="0">
+                <a:solidFill>
+                  <a:srgbClr val="2F2A26"/>
+                </a:solidFill>
+                <a:latin typeface="Calibri"/>
+              </a:rPr>
+              <a:t>…) para encontrar </a:t>
+            </a:r>
+            <a:r>
+              <a:rPr sz="1900" b="0" i="0" dirty="0" err="1">
+                <a:solidFill>
+                  <a:srgbClr val="2F2A26"/>
+                </a:solidFill>
+                <a:latin typeface="Calibri"/>
+              </a:rPr>
+              <a:t>rápido</a:t>
+            </a:r>
+            <a:r>
+              <a:rPr sz="1900" b="0" i="0" dirty="0">
+                <a:solidFill>
+                  <a:srgbClr val="2F2A26"/>
+                </a:solidFill>
+                <a:latin typeface="Calibri"/>
+              </a:rPr>
+              <a:t> </a:t>
+            </a:r>
+            <a:r>
+              <a:rPr sz="1900" b="0" i="0" dirty="0" err="1">
+                <a:solidFill>
+                  <a:srgbClr val="2F2A26"/>
+                </a:solidFill>
+                <a:latin typeface="Calibri"/>
+              </a:rPr>
+              <a:t>en</a:t>
+            </a:r>
+            <a:r>
+              <a:rPr sz="1900" b="0" i="0" dirty="0">
+                <a:solidFill>
+                  <a:srgbClr val="2F2A26"/>
+                </a:solidFill>
+                <a:latin typeface="Calibri"/>
+              </a:rPr>
+              <a:t> un </a:t>
+            </a:r>
+            <a:r>
+              <a:rPr sz="1900" b="0" i="0" dirty="0" err="1">
+                <a:solidFill>
+                  <a:srgbClr val="2F2A26"/>
+                </a:solidFill>
+                <a:latin typeface="Calibri"/>
+              </a:rPr>
+              <a:t>catálogo</a:t>
+            </a:r>
+            <a:r>
+              <a:rPr sz="1900" b="0" i="0" dirty="0">
+                <a:solidFill>
+                  <a:srgbClr val="2F2A26"/>
+                </a:solidFill>
+                <a:latin typeface="Calibri"/>
+              </a:rPr>
+              <a:t> grande.</a:t>
             </a:r>
           </a:p>
           <a:p>
@@ -4927,13 +6121,121 @@
               </a:spcAft>
             </a:pPr>
             <a:r>
-              <a:rPr sz="1900" b="0" i="0">
-                <a:solidFill>
-                  <a:srgbClr val="2F2A26"/>
-                </a:solidFill>
-                <a:latin typeface="Calibri"/>
-              </a:rPr>
-              <a:t>Cuando el stock llega al mínimo, la campana avisa y se puede reponer 1 o 5 unidades al toque.</a:t>
+              <a:rPr sz="1900" b="0" i="0" dirty="0">
+                <a:solidFill>
+                  <a:srgbClr val="2F2A26"/>
+                </a:solidFill>
+                <a:latin typeface="Calibri"/>
+              </a:rPr>
+              <a:t>Cuando el stock </a:t>
+            </a:r>
+            <a:r>
+              <a:rPr sz="1900" b="0" i="0" dirty="0" err="1">
+                <a:solidFill>
+                  <a:srgbClr val="2F2A26"/>
+                </a:solidFill>
+                <a:latin typeface="Calibri"/>
+              </a:rPr>
+              <a:t>llega</a:t>
+            </a:r>
+            <a:r>
+              <a:rPr sz="1900" b="0" i="0" dirty="0">
+                <a:solidFill>
+                  <a:srgbClr val="2F2A26"/>
+                </a:solidFill>
+                <a:latin typeface="Calibri"/>
+              </a:rPr>
+              <a:t> al </a:t>
+            </a:r>
+            <a:r>
+              <a:rPr sz="1900" b="0" i="0" dirty="0" err="1">
+                <a:solidFill>
+                  <a:srgbClr val="2F2A26"/>
+                </a:solidFill>
+                <a:latin typeface="Calibri"/>
+              </a:rPr>
+              <a:t>mínimo</a:t>
+            </a:r>
+            <a:r>
+              <a:rPr sz="1900" b="0" i="0" dirty="0">
+                <a:solidFill>
+                  <a:srgbClr val="2F2A26"/>
+                </a:solidFill>
+                <a:latin typeface="Calibri"/>
+              </a:rPr>
+              <a:t>, la campana </a:t>
+            </a:r>
+            <a:r>
+              <a:rPr sz="1900" b="0" i="0" dirty="0" err="1">
+                <a:solidFill>
+                  <a:srgbClr val="2F2A26"/>
+                </a:solidFill>
+                <a:latin typeface="Calibri"/>
+              </a:rPr>
+              <a:t>avisa</a:t>
+            </a:r>
+            <a:r>
+              <a:rPr sz="1900" b="0" i="0" dirty="0">
+                <a:solidFill>
+                  <a:srgbClr val="2F2A26"/>
+                </a:solidFill>
+                <a:latin typeface="Calibri"/>
+              </a:rPr>
+              <a:t> y se </a:t>
+            </a:r>
+            <a:r>
+              <a:rPr sz="1900" b="0" i="0" dirty="0" err="1">
+                <a:solidFill>
+                  <a:srgbClr val="2F2A26"/>
+                </a:solidFill>
+                <a:latin typeface="Calibri"/>
+              </a:rPr>
+              <a:t>puede</a:t>
+            </a:r>
+            <a:r>
+              <a:rPr sz="1900" b="0" i="0" dirty="0">
+                <a:solidFill>
+                  <a:srgbClr val="2F2A26"/>
+                </a:solidFill>
+                <a:latin typeface="Calibri"/>
+              </a:rPr>
+              <a:t> </a:t>
+            </a:r>
+            <a:r>
+              <a:rPr sz="1900" b="0" i="0" dirty="0" err="1">
+                <a:solidFill>
+                  <a:srgbClr val="2F2A26"/>
+                </a:solidFill>
+                <a:latin typeface="Calibri"/>
+              </a:rPr>
+              <a:t>reponer</a:t>
+            </a:r>
+            <a:r>
+              <a:rPr sz="1900" b="0" i="0" dirty="0">
+                <a:solidFill>
+                  <a:srgbClr val="2F2A26"/>
+                </a:solidFill>
+                <a:latin typeface="Calibri"/>
+              </a:rPr>
+              <a:t> 1 o 5 </a:t>
+            </a:r>
+            <a:r>
+              <a:rPr sz="1900" b="0" i="0" dirty="0" err="1">
+                <a:solidFill>
+                  <a:srgbClr val="2F2A26"/>
+                </a:solidFill>
+                <a:latin typeface="Calibri"/>
+              </a:rPr>
+              <a:t>unidades</a:t>
+            </a:r>
+            <a:r>
+              <a:rPr sz="1900" b="0" i="0" dirty="0">
+                <a:solidFill>
+                  <a:srgbClr val="2F2A26"/>
+                </a:solidFill>
+                <a:latin typeface="Calibri"/>
+              </a:rPr>
+              <a:t> al toque.</a:t>
             </a:r>
           </a:p>
           <a:p>
@@ -4946,13 +6248,121 @@
               </a:spcAft>
             </a:pPr>
             <a:r>
-              <a:rPr sz="1900" b="0" i="0">
-                <a:solidFill>
-                  <a:srgbClr val="2F2A26"/>
-                </a:solidFill>
-                <a:latin typeface="Calibri"/>
-              </a:rPr>
-              <a:t>Cada venta descuenta inventario: no hay que restar a mano ni al final del día.</a:t>
+              <a:rPr sz="1900" b="0" i="0" dirty="0">
+                <a:solidFill>
+                  <a:srgbClr val="2F2A26"/>
+                </a:solidFill>
+                <a:latin typeface="Calibri"/>
+              </a:rPr>
+              <a:t>Cada </a:t>
+            </a:r>
+            <a:r>
+              <a:rPr sz="1900" b="0" i="0" dirty="0" err="1">
+                <a:solidFill>
+                  <a:srgbClr val="2F2A26"/>
+                </a:solidFill>
+                <a:latin typeface="Calibri"/>
+              </a:rPr>
+              <a:t>venta</a:t>
+            </a:r>
+            <a:r>
+              <a:rPr sz="1900" b="0" i="0" dirty="0">
+                <a:solidFill>
+                  <a:srgbClr val="2F2A26"/>
+                </a:solidFill>
+                <a:latin typeface="Calibri"/>
+              </a:rPr>
+              <a:t> </a:t>
+            </a:r>
+            <a:r>
+              <a:rPr sz="1900" b="0" i="0" dirty="0" err="1">
+                <a:solidFill>
+                  <a:srgbClr val="2F2A26"/>
+                </a:solidFill>
+                <a:latin typeface="Calibri"/>
+              </a:rPr>
+              <a:t>descuenta</a:t>
+            </a:r>
+            <a:r>
+              <a:rPr sz="1900" b="0" i="0" dirty="0">
+                <a:solidFill>
+                  <a:srgbClr val="2F2A26"/>
+                </a:solidFill>
+                <a:latin typeface="Calibri"/>
+              </a:rPr>
+              <a:t> </a:t>
+            </a:r>
+            <a:r>
+              <a:rPr sz="1900" b="0" i="0" dirty="0" err="1">
+                <a:solidFill>
+                  <a:srgbClr val="2F2A26"/>
+                </a:solidFill>
+                <a:latin typeface="Calibri"/>
+              </a:rPr>
+              <a:t>inventario</a:t>
+            </a:r>
+            <a:r>
+              <a:rPr sz="1900" b="0" i="0" dirty="0">
+                <a:solidFill>
+                  <a:srgbClr val="2F2A26"/>
+                </a:solidFill>
+                <a:latin typeface="Calibri"/>
+              </a:rPr>
+              <a:t>: no hay </a:t>
+            </a:r>
+            <a:r>
+              <a:rPr sz="1900" b="0" i="0" dirty="0" err="1">
+                <a:solidFill>
+                  <a:srgbClr val="2F2A26"/>
+                </a:solidFill>
+                <a:latin typeface="Calibri"/>
+              </a:rPr>
+              <a:t>que</a:t>
+            </a:r>
+            <a:r>
+              <a:rPr sz="1900" b="0" i="0" dirty="0">
+                <a:solidFill>
+                  <a:srgbClr val="2F2A26"/>
+                </a:solidFill>
+                <a:latin typeface="Calibri"/>
+              </a:rPr>
+              <a:t> </a:t>
+            </a:r>
+            <a:r>
+              <a:rPr sz="1900" b="0" i="0" dirty="0" err="1">
+                <a:solidFill>
+                  <a:srgbClr val="2F2A26"/>
+                </a:solidFill>
+                <a:latin typeface="Calibri"/>
+              </a:rPr>
+              <a:t>restar</a:t>
+            </a:r>
+            <a:r>
+              <a:rPr sz="1900" b="0" i="0" dirty="0">
+                <a:solidFill>
+                  <a:srgbClr val="2F2A26"/>
+                </a:solidFill>
+                <a:latin typeface="Calibri"/>
+              </a:rPr>
+              <a:t> a mano </a:t>
+            </a:r>
+            <a:r>
+              <a:rPr sz="1900" b="0" i="0" dirty="0" err="1">
+                <a:solidFill>
+                  <a:srgbClr val="2F2A26"/>
+                </a:solidFill>
+                <a:latin typeface="Calibri"/>
+              </a:rPr>
+              <a:t>ni</a:t>
+            </a:r>
+            <a:r>
+              <a:rPr sz="1900" b="0" i="0" dirty="0">
+                <a:solidFill>
+                  <a:srgbClr val="2F2A26"/>
+                </a:solidFill>
+                <a:latin typeface="Calibri"/>
+              </a:rPr>
+              <a:t> al final del día.</a:t>
             </a:r>
           </a:p>
           <a:p>
@@ -4965,13 +6375,193 @@
               </a:spcAft>
             </a:pPr>
             <a:r>
-              <a:rPr sz="1900" b="0" i="0">
-                <a:solidFill>
-                  <a:srgbClr val="2F2A26"/>
-                </a:solidFill>
-                <a:latin typeface="Calibri"/>
-              </a:rPr>
-              <a:t>Todo queda ligado por id: el historial muestra qué se vendió y cuánto stock quedó después.</a:t>
+              <a:rPr sz="1900" b="0" i="0" dirty="0">
+                <a:solidFill>
+                  <a:srgbClr val="2F2A26"/>
+                </a:solidFill>
+                <a:latin typeface="Calibri"/>
+              </a:rPr>
+              <a:t>Todo </a:t>
+            </a:r>
+            <a:r>
+              <a:rPr sz="1900" b="0" i="0" dirty="0" err="1">
+                <a:solidFill>
+                  <a:srgbClr val="2F2A26"/>
+                </a:solidFill>
+                <a:latin typeface="Calibri"/>
+              </a:rPr>
+              <a:t>queda</a:t>
+            </a:r>
+            <a:r>
+              <a:rPr sz="1900" b="0" i="0" dirty="0">
+                <a:solidFill>
+                  <a:srgbClr val="2F2A26"/>
+                </a:solidFill>
+                <a:latin typeface="Calibri"/>
+              </a:rPr>
+              <a:t> </a:t>
+            </a:r>
+            <a:r>
+              <a:rPr sz="1900" b="0" i="0" dirty="0" err="1">
+                <a:solidFill>
+                  <a:srgbClr val="2F2A26"/>
+                </a:solidFill>
+                <a:latin typeface="Calibri"/>
+              </a:rPr>
+              <a:t>ligado</a:t>
+            </a:r>
+            <a:r>
+              <a:rPr sz="1900" b="0" i="0" dirty="0">
+                <a:solidFill>
+                  <a:srgbClr val="2F2A26"/>
+                </a:solidFill>
+                <a:latin typeface="Calibri"/>
+              </a:rPr>
+              <a:t> </a:t>
+            </a:r>
+            <a:r>
+              <a:rPr sz="1900" b="0" i="0" dirty="0" err="1">
+                <a:solidFill>
+                  <a:srgbClr val="2F2A26"/>
+                </a:solidFill>
+                <a:latin typeface="Calibri"/>
+              </a:rPr>
+              <a:t>por</a:t>
+            </a:r>
+            <a:r>
+              <a:rPr sz="1900" b="0" i="0" dirty="0">
+                <a:solidFill>
+                  <a:srgbClr val="2F2A26"/>
+                </a:solidFill>
+                <a:latin typeface="Calibri"/>
+              </a:rPr>
+              <a:t> id: el </a:t>
+            </a:r>
+            <a:r>
+              <a:rPr sz="1900" b="0" i="0" dirty="0" err="1">
+                <a:solidFill>
+                  <a:srgbClr val="2F2A26"/>
+                </a:solidFill>
+                <a:latin typeface="Calibri"/>
+              </a:rPr>
+              <a:t>historial</a:t>
+            </a:r>
+            <a:r>
+              <a:rPr sz="1900" b="0" i="0" dirty="0">
+                <a:solidFill>
+                  <a:srgbClr val="2F2A26"/>
+                </a:solidFill>
+                <a:latin typeface="Calibri"/>
+              </a:rPr>
+              <a:t> </a:t>
+            </a:r>
+            <a:r>
+              <a:rPr sz="1900" b="0" i="0" dirty="0" err="1">
+                <a:solidFill>
+                  <a:srgbClr val="2F2A26"/>
+                </a:solidFill>
+                <a:latin typeface="Calibri"/>
+              </a:rPr>
+              <a:t>muestra</a:t>
+            </a:r>
+            <a:r>
+              <a:rPr sz="1900" b="0" i="0" dirty="0">
+                <a:solidFill>
+                  <a:srgbClr val="2F2A26"/>
+                </a:solidFill>
+                <a:latin typeface="Calibri"/>
+              </a:rPr>
+              <a:t> </a:t>
+            </a:r>
+            <a:r>
+              <a:rPr sz="1900" b="0" i="0" dirty="0" err="1">
+                <a:solidFill>
+                  <a:srgbClr val="2F2A26"/>
+                </a:solidFill>
+                <a:latin typeface="Calibri"/>
+              </a:rPr>
+              <a:t>qué</a:t>
+            </a:r>
+            <a:r>
+              <a:rPr sz="1900" b="0" i="0" dirty="0">
+                <a:solidFill>
+                  <a:srgbClr val="2F2A26"/>
+                </a:solidFill>
+                <a:latin typeface="Calibri"/>
+              </a:rPr>
+              <a:t> se </a:t>
+            </a:r>
+            <a:r>
+              <a:rPr sz="1900" b="0" i="0" dirty="0" err="1">
+                <a:solidFill>
+                  <a:srgbClr val="2F2A26"/>
+                </a:solidFill>
+                <a:latin typeface="Calibri"/>
+              </a:rPr>
+              <a:t>vendió</a:t>
+            </a:r>
+            <a:r>
+              <a:rPr sz="1900" b="0" i="0" dirty="0">
+                <a:solidFill>
+                  <a:srgbClr val="2F2A26"/>
+                </a:solidFill>
+                <a:latin typeface="Calibri"/>
+              </a:rPr>
+              <a:t> y </a:t>
+            </a:r>
+            <a:r>
+              <a:rPr sz="1900" b="0" i="0" dirty="0" err="1">
+                <a:solidFill>
+                  <a:srgbClr val="2F2A26"/>
+                </a:solidFill>
+                <a:latin typeface="Calibri"/>
+              </a:rPr>
+              <a:t>cuánto</a:t>
+            </a:r>
+            <a:r>
+              <a:rPr sz="1900" b="0" i="0" dirty="0">
+                <a:solidFill>
+                  <a:srgbClr val="2F2A26"/>
+                </a:solidFill>
+                <a:latin typeface="Calibri"/>
+              </a:rPr>
+              <a:t> stock </a:t>
+            </a:r>
+            <a:r>
+              <a:rPr sz="1900" b="0" i="0" dirty="0" err="1">
+                <a:solidFill>
+                  <a:srgbClr val="2F2A26"/>
+                </a:solidFill>
+                <a:latin typeface="Calibri"/>
+              </a:rPr>
+              <a:t>quedó</a:t>
+            </a:r>
+            <a:r>
+              <a:rPr sz="1900" b="0" i="0" dirty="0">
+                <a:solidFill>
+                  <a:srgbClr val="2F2A26"/>
+                </a:solidFill>
+                <a:latin typeface="Calibri"/>
+              </a:rPr>
+              <a:t> </a:t>
+            </a:r>
+            <a:r>
+              <a:rPr sz="1900" b="0" i="0" dirty="0" err="1">
+                <a:solidFill>
+                  <a:srgbClr val="2F2A26"/>
+                </a:solidFill>
+                <a:latin typeface="Calibri"/>
+              </a:rPr>
+              <a:t>después</a:t>
+            </a:r>
+            <a:r>
+              <a:rPr sz="1900" b="0" i="0" dirty="0">
+                <a:solidFill>
+                  <a:srgbClr val="2F2A26"/>
+                </a:solidFill>
+                <a:latin typeface="Calibri"/>
+              </a:rPr>
+              <a:t>.</a:t>
             </a:r>
           </a:p>
         </p:txBody>
@@ -4985,7 +6575,7 @@
 </file>
 
 <file path=ppt/slides/slide6.xml><?xml version="1.0" encoding="utf-8"?>
-<p:sld xmlns:a="http://schemas.openxmlformats.org/drawingml/2006/main" xmlns:p="http://schemas.openxmlformats.org/presentationml/2006/main" xmlns:r="http://schemas.openxmlformats.org/officeDocument/2006/relationships">
+<p:sld xmlns:a="http://schemas.openxmlformats.org/drawingml/2006/main" xmlns:r="http://schemas.openxmlformats.org/officeDocument/2006/relationships" xmlns:p="http://schemas.openxmlformats.org/presentationml/2006/main">
   <p:cSld>
     <p:spTree>
       <p:nvGrpSpPr>
@@ -4993,7 +6583,14 @@
         <p:cNvGrpSpPr/>
         <p:nvPr/>
       </p:nvGrpSpPr>
-      <p:grpSpPr/>
+      <p:grpSpPr>
+        <a:xfrm>
+          <a:off x="0" y="0"/>
+          <a:ext cx="0" cy="0"/>
+          <a:chOff x="0" y="0"/>
+          <a:chExt cx="0" cy="0"/>
+        </a:xfrm>
+      </p:grpSpPr>
       <p:sp>
         <p:nvSpPr>
           <p:cNvPr id="2" name="Rectangle 1"/>
@@ -5034,6 +6631,7 @@
           <a:lstStyle/>
           <a:p>
             <a:pPr algn="ctr"/>
+            <a:endParaRPr/>
           </a:p>
         </p:txBody>
       </p:sp>
@@ -5077,6 +6675,7 @@
           <a:lstStyle/>
           <a:p>
             <a:pPr algn="ctr"/>
+            <a:endParaRPr/>
           </a:p>
         </p:txBody>
       </p:sp>
@@ -5187,6 +6786,7 @@
           <a:lstStyle/>
           <a:p>
             <a:pPr algn="ctr"/>
+            <a:endParaRPr/>
           </a:p>
         </p:txBody>
       </p:sp>
@@ -5226,7 +6826,7 @@
           </a:fontRef>
         </p:style>
         <p:txBody>
-          <a:bodyPr rtlCol="0" anchor="ctr" wrap="none"/>
+          <a:bodyPr wrap="none" rtlCol="0" anchor="ctr"/>
           <a:lstStyle/>
           <a:p>
             <a:pPr algn="ctr"/>
@@ -5335,6 +6935,7 @@
           <a:lstStyle/>
           <a:p>
             <a:pPr algn="ctr"/>
+            <a:endParaRPr/>
           </a:p>
         </p:txBody>
       </p:sp>
@@ -5374,7 +6975,7 @@
           </a:fontRef>
         </p:style>
         <p:txBody>
-          <a:bodyPr rtlCol="0" anchor="ctr" wrap="none"/>
+          <a:bodyPr wrap="none" rtlCol="0" anchor="ctr"/>
           <a:lstStyle/>
           <a:p>
             <a:pPr algn="ctr"/>
@@ -5483,6 +7084,7 @@
           <a:lstStyle/>
           <a:p>
             <a:pPr algn="ctr"/>
+            <a:endParaRPr/>
           </a:p>
         </p:txBody>
       </p:sp>
@@ -5522,7 +7124,7 @@
           </a:fontRef>
         </p:style>
         <p:txBody>
-          <a:bodyPr rtlCol="0" anchor="ctr" wrap="none"/>
+          <a:bodyPr wrap="none" rtlCol="0" anchor="ctr"/>
           <a:lstStyle/>
           <a:p>
             <a:pPr algn="ctr"/>
@@ -5631,6 +7233,7 @@
           <a:lstStyle/>
           <a:p>
             <a:pPr algn="ctr"/>
+            <a:endParaRPr/>
           </a:p>
         </p:txBody>
       </p:sp>
@@ -5670,7 +7273,7 @@
           </a:fontRef>
         </p:style>
         <p:txBody>
-          <a:bodyPr rtlCol="0" anchor="ctr" wrap="none"/>
+          <a:bodyPr wrap="none" rtlCol="0" anchor="ctr"/>
           <a:lstStyle/>
           <a:p>
             <a:pPr algn="ctr"/>
@@ -5746,7 +7349,7 @@
 </file>
 
 <file path=ppt/slides/slide7.xml><?xml version="1.0" encoding="utf-8"?>
-<p:sld xmlns:a="http://schemas.openxmlformats.org/drawingml/2006/main" xmlns:p="http://schemas.openxmlformats.org/presentationml/2006/main" xmlns:r="http://schemas.openxmlformats.org/officeDocument/2006/relationships">
+<p:sld xmlns:a="http://schemas.openxmlformats.org/drawingml/2006/main" xmlns:r="http://schemas.openxmlformats.org/officeDocument/2006/relationships" xmlns:p="http://schemas.openxmlformats.org/presentationml/2006/main">
   <p:cSld>
     <p:spTree>
       <p:nvGrpSpPr>
@@ -5754,7 +7357,14 @@
         <p:cNvGrpSpPr/>
         <p:nvPr/>
       </p:nvGrpSpPr>
-      <p:grpSpPr/>
+      <p:grpSpPr>
+        <a:xfrm>
+          <a:off x="0" y="0"/>
+          <a:ext cx="0" cy="0"/>
+          <a:chOff x="0" y="0"/>
+          <a:chExt cx="0" cy="0"/>
+        </a:xfrm>
+      </p:grpSpPr>
       <p:sp>
         <p:nvSpPr>
           <p:cNvPr id="2" name="Rectangle 1"/>
@@ -5795,6 +7405,7 @@
           <a:lstStyle/>
           <a:p>
             <a:pPr algn="ctr"/>
+            <a:endParaRPr/>
           </a:p>
         </p:txBody>
       </p:sp>
@@ -5838,6 +7449,7 @@
           <a:lstStyle/>
           <a:p>
             <a:pPr algn="ctr"/>
+            <a:endParaRPr/>
           </a:p>
         </p:txBody>
       </p:sp>
